--- a/Poster2023.pptx
+++ b/Poster2023.pptx
@@ -3049,7 +3049,7 @@
         </p:nvSpPr>
         <p:spPr>
           <a:xfrm>
-            <a:off x="816985" y="21461566"/>
+            <a:off x="816985" y="21562315"/>
             <a:ext cx="15249378" cy="20862668"/>
           </a:xfrm>
           <a:prstGeom prst="roundRect">
@@ -6221,7 +6221,7 @@
         </p:nvSpPr>
         <p:spPr>
           <a:xfrm>
-            <a:off x="17271940" y="14183584"/>
+            <a:off x="17232023" y="14306777"/>
             <a:ext cx="13258800" cy="769441"/>
           </a:xfrm>
           <a:prstGeom prst="rect">
@@ -6522,8 +6522,8 @@
         </p:blipFill>
         <p:spPr>
           <a:xfrm>
-            <a:off x="7754960" y="33209683"/>
-            <a:ext cx="7470931" cy="1115931"/>
+            <a:off x="9213661" y="30944996"/>
+            <a:ext cx="6001095" cy="896382"/>
           </a:xfrm>
           <a:prstGeom prst="rect">
             <a:avLst/>
@@ -6552,8 +6552,8 @@
         </p:blipFill>
         <p:spPr>
           <a:xfrm>
-            <a:off x="1982715" y="37885613"/>
-            <a:ext cx="13232041" cy="2834923"/>
+            <a:off x="1520999" y="33440049"/>
+            <a:ext cx="10320027" cy="2211033"/>
           </a:xfrm>
           <a:prstGeom prst="rect">
             <a:avLst/>
@@ -6969,7 +6969,7 @@
         </p:blipFill>
         <p:spPr>
           <a:xfrm>
-            <a:off x="8101174" y="23796735"/>
+            <a:off x="8239718" y="22973400"/>
             <a:ext cx="6646312" cy="5988261"/>
           </a:xfrm>
           <a:prstGeom prst="rect">
@@ -6991,7 +6991,7 @@
         </p:nvSpPr>
         <p:spPr>
           <a:xfrm>
-            <a:off x="1528037" y="24133223"/>
+            <a:off x="1528037" y="23984271"/>
             <a:ext cx="13258800" cy="769441"/>
           </a:xfrm>
           <a:prstGeom prst="rect">
@@ -7030,7 +7030,7 @@
         </p:nvSpPr>
         <p:spPr>
           <a:xfrm>
-            <a:off x="1698180" y="25296093"/>
+            <a:off x="1698180" y="24885097"/>
             <a:ext cx="5386761" cy="914400"/>
           </a:xfrm>
           <a:prstGeom prst="rect">
@@ -7288,7 +7288,7 @@
         </p:nvSpPr>
         <p:spPr>
           <a:xfrm>
-            <a:off x="1672625" y="28086694"/>
+            <a:off x="1672625" y="27625355"/>
             <a:ext cx="5386761" cy="914400"/>
           </a:xfrm>
           <a:prstGeom prst="rect">
@@ -7497,7 +7497,7 @@
         </p:nvSpPr>
         <p:spPr>
           <a:xfrm>
-            <a:off x="5708264" y="30019351"/>
+            <a:off x="5708264" y="29023479"/>
             <a:ext cx="9506492" cy="1446550"/>
           </a:xfrm>
           <a:prstGeom prst="rect">
@@ -7543,7 +7543,7 @@
         </p:nvSpPr>
         <p:spPr>
           <a:xfrm>
-            <a:off x="1823222" y="31566136"/>
+            <a:off x="1772338" y="30098114"/>
             <a:ext cx="8348044" cy="1039617"/>
           </a:xfrm>
           <a:prstGeom prst="rect">
@@ -7676,7 +7676,7 @@
         </p:nvSpPr>
         <p:spPr>
           <a:xfrm>
-            <a:off x="1823222" y="36439862"/>
+            <a:off x="1822064" y="32355285"/>
             <a:ext cx="7772400" cy="457200"/>
           </a:xfrm>
           <a:prstGeom prst="rect">
@@ -7809,7 +7809,7 @@
         </p:nvSpPr>
         <p:spPr>
           <a:xfrm>
-            <a:off x="9575884" y="34261924"/>
+            <a:off x="10359308" y="31859539"/>
             <a:ext cx="4403176" cy="1189387"/>
           </a:xfrm>
           <a:prstGeom prst="rect">
@@ -7958,6 +7958,190 @@
               </a:rPr>
               <a:t> de Moore–Penrose</a:t>
             </a:r>
+          </a:p>
+        </p:txBody>
+      </p:sp>
+      <p:sp>
+        <p:nvSpPr>
+          <p:cNvPr id="13" name="CuadroTexto 12">
+            <a:extLst>
+              <a:ext uri="{FF2B5EF4-FFF2-40B4-BE49-F238E27FC236}">
+                <a16:creationId xmlns:a16="http://schemas.microsoft.com/office/drawing/2014/main" id="{CA93ABF1-D19F-FF6F-80AA-653567BEB1A3}"/>
+              </a:ext>
+            </a:extLst>
+          </p:cNvPr>
+          <p:cNvSpPr txBox="1"/>
+          <p:nvPr/>
+        </p:nvSpPr>
+        <p:spPr>
+          <a:xfrm>
+            <a:off x="1769474" y="36689937"/>
+            <a:ext cx="9506492" cy="1446550"/>
+          </a:xfrm>
+          <a:prstGeom prst="rect">
+            <a:avLst/>
+          </a:prstGeom>
+          <a:noFill/>
+        </p:spPr>
+        <p:txBody>
+          <a:bodyPr wrap="square" rtlCol="0">
+            <a:spAutoFit/>
+          </a:bodyPr>
+          <a:lstStyle/>
+          <a:p>
+            <a:pPr marL="571500" indent="-571500">
+              <a:buFont typeface="Arial" panose="020B0604020202020204" pitchFamily="34" charset="0"/>
+              <a:buChar char="•"/>
+            </a:pPr>
+            <a:r>
+              <a:rPr lang="es-MX" sz="4400" dirty="0"/>
+              <a:t>Método de </a:t>
+            </a:r>
+            <a:r>
+              <a:rPr lang="es-MX" sz="4400" dirty="0" err="1"/>
+              <a:t>Rodrigues</a:t>
+            </a:r>
+            <a:endParaRPr lang="es-MX" sz="4400" dirty="0"/>
+          </a:p>
+          <a:p>
+            <a:pPr marL="571500" indent="-571500">
+              <a:buFont typeface="Arial" panose="020B0604020202020204" pitchFamily="34" charset="0"/>
+              <a:buChar char="•"/>
+            </a:pPr>
+            <a:endParaRPr lang="es-MX" sz="4400" dirty="0"/>
+          </a:p>
+        </p:txBody>
+      </p:sp>
+      <p:sp>
+        <p:nvSpPr>
+          <p:cNvPr id="16" name="Text 116">
+            <a:extLst>
+              <a:ext uri="{FF2B5EF4-FFF2-40B4-BE49-F238E27FC236}">
+                <a16:creationId xmlns:a16="http://schemas.microsoft.com/office/drawing/2014/main" id="{44FB4C62-FC88-774E-BC28-9E1D6E565884}"/>
+              </a:ext>
+            </a:extLst>
+          </p:cNvPr>
+          <p:cNvSpPr/>
+          <p:nvPr/>
+        </p:nvSpPr>
+        <p:spPr>
+          <a:xfrm>
+            <a:off x="1822064" y="37931193"/>
+            <a:ext cx="8348044" cy="1039617"/>
+          </a:xfrm>
+          <a:prstGeom prst="rect">
+            <a:avLst/>
+          </a:prstGeom>
+          <a:noFill/>
+          <a:ln/>
+        </p:spPr>
+        <p:txBody>
+          <a:bodyPr wrap="square" lIns="0" tIns="0" rIns="0" bIns="0" rtlCol="0" anchor="ctr"/>
+          <a:lstStyle>
+            <a:lvl1pPr marL="0" algn="l" defTabSz="914400" rtl="0" eaLnBrk="1" latinLnBrk="0" hangingPunct="1">
+              <a:defRPr sz="1800" kern="1200">
+                <a:solidFill>
+                  <a:schemeClr val="tx1"/>
+                </a:solidFill>
+                <a:latin typeface="+mn-lt"/>
+                <a:ea typeface="+mn-ea"/>
+                <a:cs typeface="+mn-cs"/>
+              </a:defRPr>
+            </a:lvl1pPr>
+            <a:lvl2pPr marL="457200" algn="l" defTabSz="914400" rtl="0" eaLnBrk="1" latinLnBrk="0" hangingPunct="1">
+              <a:defRPr sz="1800" kern="1200">
+                <a:solidFill>
+                  <a:schemeClr val="tx1"/>
+                </a:solidFill>
+                <a:latin typeface="+mn-lt"/>
+                <a:ea typeface="+mn-ea"/>
+                <a:cs typeface="+mn-cs"/>
+              </a:defRPr>
+            </a:lvl2pPr>
+            <a:lvl3pPr marL="914400" algn="l" defTabSz="914400" rtl="0" eaLnBrk="1" latinLnBrk="0" hangingPunct="1">
+              <a:defRPr sz="1800" kern="1200">
+                <a:solidFill>
+                  <a:schemeClr val="tx1"/>
+                </a:solidFill>
+                <a:latin typeface="+mn-lt"/>
+                <a:ea typeface="+mn-ea"/>
+                <a:cs typeface="+mn-cs"/>
+              </a:defRPr>
+            </a:lvl3pPr>
+            <a:lvl4pPr marL="1371600" algn="l" defTabSz="914400" rtl="0" eaLnBrk="1" latinLnBrk="0" hangingPunct="1">
+              <a:defRPr sz="1800" kern="1200">
+                <a:solidFill>
+                  <a:schemeClr val="tx1"/>
+                </a:solidFill>
+                <a:latin typeface="+mn-lt"/>
+                <a:ea typeface="+mn-ea"/>
+                <a:cs typeface="+mn-cs"/>
+              </a:defRPr>
+            </a:lvl4pPr>
+            <a:lvl5pPr marL="1828800" algn="l" defTabSz="914400" rtl="0" eaLnBrk="1" latinLnBrk="0" hangingPunct="1">
+              <a:defRPr sz="1800" kern="1200">
+                <a:solidFill>
+                  <a:schemeClr val="tx1"/>
+                </a:solidFill>
+                <a:latin typeface="+mn-lt"/>
+                <a:ea typeface="+mn-ea"/>
+                <a:cs typeface="+mn-cs"/>
+              </a:defRPr>
+            </a:lvl5pPr>
+            <a:lvl6pPr marL="2286000" algn="l" defTabSz="914400" rtl="0" eaLnBrk="1" latinLnBrk="0" hangingPunct="1">
+              <a:defRPr sz="1800" kern="1200">
+                <a:solidFill>
+                  <a:schemeClr val="tx1"/>
+                </a:solidFill>
+                <a:latin typeface="+mn-lt"/>
+                <a:ea typeface="+mn-ea"/>
+                <a:cs typeface="+mn-cs"/>
+              </a:defRPr>
+            </a:lvl6pPr>
+            <a:lvl7pPr marL="2743200" algn="l" defTabSz="914400" rtl="0" eaLnBrk="1" latinLnBrk="0" hangingPunct="1">
+              <a:defRPr sz="1800" kern="1200">
+                <a:solidFill>
+                  <a:schemeClr val="tx1"/>
+                </a:solidFill>
+                <a:latin typeface="+mn-lt"/>
+                <a:ea typeface="+mn-ea"/>
+                <a:cs typeface="+mn-cs"/>
+              </a:defRPr>
+            </a:lvl7pPr>
+            <a:lvl8pPr marL="3200400" algn="l" defTabSz="914400" rtl="0" eaLnBrk="1" latinLnBrk="0" hangingPunct="1">
+              <a:defRPr sz="1800" kern="1200">
+                <a:solidFill>
+                  <a:schemeClr val="tx1"/>
+                </a:solidFill>
+                <a:latin typeface="+mn-lt"/>
+                <a:ea typeface="+mn-ea"/>
+                <a:cs typeface="+mn-cs"/>
+              </a:defRPr>
+            </a:lvl8pPr>
+            <a:lvl9pPr marL="3657600" algn="l" defTabSz="914400" rtl="0" eaLnBrk="1" latinLnBrk="0" hangingPunct="1">
+              <a:defRPr sz="1800" kern="1200">
+                <a:solidFill>
+                  <a:schemeClr val="tx1"/>
+                </a:solidFill>
+                <a:latin typeface="+mn-lt"/>
+                <a:ea typeface="+mn-ea"/>
+                <a:cs typeface="+mn-cs"/>
+              </a:defRPr>
+            </a:lvl9pPr>
+          </a:lstStyle>
+          <a:p>
+            <a:r>
+              <a:rPr lang="es-MX" sz="3200" dirty="0"/>
+              <a:t>Para corregir las mediciones se define un modelo de transformación afín expresado como</a:t>
+            </a:r>
+            <a:endParaRPr lang="en-US" sz="3200" dirty="0">
+              <a:solidFill>
+                <a:schemeClr val="tx1">
+                  <a:lumMod val="95000"/>
+                  <a:lumOff val="5000"/>
+                </a:schemeClr>
+              </a:solidFill>
+            </a:endParaRPr>
           </a:p>
         </p:txBody>
       </p:sp>

--- a/Poster2023.pptx
+++ b/Poster2023.pptx
@@ -254,7 +254,7 @@
           <a:p>
             <a:fld id="{96A247A4-B290-419D-9DCB-8D23B210FFBF}" type="datetimeFigureOut">
               <a:rPr lang="es-MX" smtClean="0"/>
-              <a:t>22/07/2026</a:t>
+              <a:t>24/07/2026</a:t>
             </a:fld>
             <a:endParaRPr lang="es-MX"/>
           </a:p>
@@ -424,7 +424,7 @@
           <a:p>
             <a:fld id="{96A247A4-B290-419D-9DCB-8D23B210FFBF}" type="datetimeFigureOut">
               <a:rPr lang="es-MX" smtClean="0"/>
-              <a:t>22/07/2026</a:t>
+              <a:t>24/07/2026</a:t>
             </a:fld>
             <a:endParaRPr lang="es-MX"/>
           </a:p>
@@ -604,7 +604,7 @@
           <a:p>
             <a:fld id="{96A247A4-B290-419D-9DCB-8D23B210FFBF}" type="datetimeFigureOut">
               <a:rPr lang="es-MX" smtClean="0"/>
-              <a:t>22/07/2026</a:t>
+              <a:t>24/07/2026</a:t>
             </a:fld>
             <a:endParaRPr lang="es-MX"/>
           </a:p>
@@ -774,7 +774,7 @@
           <a:p>
             <a:fld id="{96A247A4-B290-419D-9DCB-8D23B210FFBF}" type="datetimeFigureOut">
               <a:rPr lang="es-MX" smtClean="0"/>
-              <a:t>22/07/2026</a:t>
+              <a:t>24/07/2026</a:t>
             </a:fld>
             <a:endParaRPr lang="es-MX"/>
           </a:p>
@@ -1018,7 +1018,7 @@
           <a:p>
             <a:fld id="{96A247A4-B290-419D-9DCB-8D23B210FFBF}" type="datetimeFigureOut">
               <a:rPr lang="es-MX" smtClean="0"/>
-              <a:t>22/07/2026</a:t>
+              <a:t>24/07/2026</a:t>
             </a:fld>
             <a:endParaRPr lang="es-MX"/>
           </a:p>
@@ -1250,7 +1250,7 @@
           <a:p>
             <a:fld id="{96A247A4-B290-419D-9DCB-8D23B210FFBF}" type="datetimeFigureOut">
               <a:rPr lang="es-MX" smtClean="0"/>
-              <a:t>22/07/2026</a:t>
+              <a:t>24/07/2026</a:t>
             </a:fld>
             <a:endParaRPr lang="es-MX"/>
           </a:p>
@@ -1617,7 +1617,7 @@
           <a:p>
             <a:fld id="{96A247A4-B290-419D-9DCB-8D23B210FFBF}" type="datetimeFigureOut">
               <a:rPr lang="es-MX" smtClean="0"/>
-              <a:t>22/07/2026</a:t>
+              <a:t>24/07/2026</a:t>
             </a:fld>
             <a:endParaRPr lang="es-MX"/>
           </a:p>
@@ -1735,7 +1735,7 @@
           <a:p>
             <a:fld id="{96A247A4-B290-419D-9DCB-8D23B210FFBF}" type="datetimeFigureOut">
               <a:rPr lang="es-MX" smtClean="0"/>
-              <a:t>22/07/2026</a:t>
+              <a:t>24/07/2026</a:t>
             </a:fld>
             <a:endParaRPr lang="es-MX"/>
           </a:p>
@@ -1830,7 +1830,7 @@
           <a:p>
             <a:fld id="{96A247A4-B290-419D-9DCB-8D23B210FFBF}" type="datetimeFigureOut">
               <a:rPr lang="es-MX" smtClean="0"/>
-              <a:t>22/07/2026</a:t>
+              <a:t>24/07/2026</a:t>
             </a:fld>
             <a:endParaRPr lang="es-MX"/>
           </a:p>
@@ -2107,7 +2107,7 @@
           <a:p>
             <a:fld id="{96A247A4-B290-419D-9DCB-8D23B210FFBF}" type="datetimeFigureOut">
               <a:rPr lang="es-MX" smtClean="0"/>
-              <a:t>22/07/2026</a:t>
+              <a:t>24/07/2026</a:t>
             </a:fld>
             <a:endParaRPr lang="es-MX"/>
           </a:p>
@@ -2364,7 +2364,7 @@
           <a:p>
             <a:fld id="{96A247A4-B290-419D-9DCB-8D23B210FFBF}" type="datetimeFigureOut">
               <a:rPr lang="es-MX" smtClean="0"/>
-              <a:t>22/07/2026</a:t>
+              <a:t>24/07/2026</a:t>
             </a:fld>
             <a:endParaRPr lang="es-MX"/>
           </a:p>
@@ -2577,7 +2577,7 @@
           <a:p>
             <a:fld id="{96A247A4-B290-419D-9DCB-8D23B210FFBF}" type="datetimeFigureOut">
               <a:rPr lang="es-MX" smtClean="0"/>
-              <a:t>22/07/2026</a:t>
+              <a:t>24/07/2026</a:t>
             </a:fld>
             <a:endParaRPr lang="es-MX"/>
           </a:p>
@@ -3049,7 +3049,7 @@
         </p:nvSpPr>
         <p:spPr>
           <a:xfrm>
-            <a:off x="816985" y="21562315"/>
+            <a:off x="853069" y="21636302"/>
             <a:ext cx="15249378" cy="20862668"/>
           </a:xfrm>
           <a:prstGeom prst="roundRect">
@@ -3159,7 +3159,7 @@
             </p:nvSpPr>
             <p:spPr>
               <a:xfrm>
-                <a:off x="16429801" y="13853161"/>
+                <a:off x="16395088" y="13937383"/>
                 <a:ext cx="15249378" cy="16783494"/>
               </a:xfrm>
               <a:prstGeom prst="roundRect">
@@ -4653,7 +4653,7 @@
             </p:nvSpPr>
             <p:spPr>
               <a:xfrm>
-                <a:off x="16429801" y="13853161"/>
+                <a:off x="16395088" y="13937383"/>
                 <a:ext cx="15249378" cy="16783494"/>
               </a:xfrm>
               <a:prstGeom prst="roundRect">
@@ -4997,7 +4997,7 @@
         </p:nvSpPr>
         <p:spPr>
           <a:xfrm>
-            <a:off x="17068800" y="21408698"/>
+            <a:off x="17172218" y="13363486"/>
             <a:ext cx="5120640" cy="851297"/>
           </a:xfrm>
           <a:prstGeom prst="roundRect">
@@ -5313,13 +5313,16 @@
             <a:pPr algn="ctr"/>
             <a:r>
               <a:rPr lang="es-MX" sz="4000" b="1" dirty="0"/>
-              <a:t>Christian Velazquez-Vargas, Zahid Martínez-Cortez, Christian Verastegui-</a:t>
+              <a:t>Christian Alexis Velazquez-Vargas, Iván Zahid Martínez-Cortez, Christian Abel Verastegui-</a:t>
             </a:r>
             <a:r>
               <a:rPr lang="es-MX" sz="4000" b="1" dirty="0" err="1"/>
               <a:t>Aboites</a:t>
             </a:r>
-            <a:endParaRPr lang="es-MX" sz="4000" b="1" dirty="0"/>
+            <a:r>
+              <a:rPr lang="es-MX" sz="4000" b="1" dirty="0"/>
+              <a:t>, Gabriel Alejandro Galaviz-Mosqueda</a:t>
+            </a:r>
           </a:p>
           <a:p>
             <a:pPr algn="ctr"/>
@@ -5426,7 +5429,7 @@
         <p:spPr>
           <a:xfrm>
             <a:off x="17010136" y="32452012"/>
-            <a:ext cx="14295120" cy="4524315"/>
+            <a:ext cx="14295120" cy="5078313"/>
           </a:xfrm>
           <a:prstGeom prst="rect">
             <a:avLst/>
@@ -5447,15 +5450,187 @@
                 <a:ea typeface="Calibri" panose="020F0502020204030204" pitchFamily="34" charset="0"/>
                 <a:cs typeface="Times New Roman" panose="02020603050405020304" pitchFamily="18" charset="0"/>
               </a:rPr>
-              <a:t>La plataforma de simulación propuesta permite simular un grupo de robots cudrirrotores realizando un vuelo en formación siguiendo una trayectoria de referencia. El simulador de red permite transmitir la información del líder a los seguidores, mientras que el movimiento de cada robot es calculado por el simulador de vuelo en base a la información recibida. Al integrar estos dos simuladores se puede obtener una representación más cercana a la realidad y se pueden probar diferentes mecanismos de control y comunicación para analizar </a:t>
-            </a:r>
-            <a:r>
-              <a:rPr lang="es-MX" sz="3600" kern="100" dirty="0">
+              <a:t>Integración de Calibración y Alineación La caracterización mediante el modelo afín cuantifica los tres defectos deterministas del acelerómetro (sesgo, factores de escala </a:t>
+            </a:r>
+            <a:r>
+              <a:rPr lang="es-MX" sz="3600" kern="100" dirty="0" err="1">
+                <a:effectLst/>
                 <a:latin typeface="Calibri" panose="020F0502020204030204" pitchFamily="34" charset="0"/>
                 <a:ea typeface="Calibri" panose="020F0502020204030204" pitchFamily="34" charset="0"/>
                 <a:cs typeface="Times New Roman" panose="02020603050405020304" pitchFamily="18" charset="0"/>
               </a:rPr>
-              <a:t>su desempeño en este sistema complejo.</a:t>
+              <a:t>s_x</a:t>
+            </a:r>
+            <a:r>
+              <a:rPr lang="es-MX" sz="3600" kern="100" dirty="0">
+                <a:effectLst/>
+                <a:latin typeface="Calibri" panose="020F0502020204030204" pitchFamily="34" charset="0"/>
+                <a:ea typeface="Calibri" panose="020F0502020204030204" pitchFamily="34" charset="0"/>
+                <a:cs typeface="Times New Roman" panose="02020603050405020304" pitchFamily="18" charset="0"/>
+              </a:rPr>
+              <a:t>, </a:t>
+            </a:r>
+            <a:r>
+              <a:rPr lang="es-MX" sz="3600" kern="100" dirty="0" err="1">
+                <a:effectLst/>
+                <a:latin typeface="Calibri" panose="020F0502020204030204" pitchFamily="34" charset="0"/>
+                <a:ea typeface="Calibri" panose="020F0502020204030204" pitchFamily="34" charset="0"/>
+                <a:cs typeface="Times New Roman" panose="02020603050405020304" pitchFamily="18" charset="0"/>
+              </a:rPr>
+              <a:t>s_y</a:t>
+            </a:r>
+            <a:r>
+              <a:rPr lang="es-MX" sz="3600" kern="100" dirty="0">
+                <a:effectLst/>
+                <a:latin typeface="Calibri" panose="020F0502020204030204" pitchFamily="34" charset="0"/>
+                <a:ea typeface="Calibri" panose="020F0502020204030204" pitchFamily="34" charset="0"/>
+                <a:cs typeface="Times New Roman" panose="02020603050405020304" pitchFamily="18" charset="0"/>
+              </a:rPr>
+              <a:t>, </a:t>
+            </a:r>
+            <a:r>
+              <a:rPr lang="es-MX" sz="3600" kern="100" dirty="0" err="1">
+                <a:effectLst/>
+                <a:latin typeface="Calibri" panose="020F0502020204030204" pitchFamily="34" charset="0"/>
+                <a:ea typeface="Calibri" panose="020F0502020204030204" pitchFamily="34" charset="0"/>
+                <a:cs typeface="Times New Roman" panose="02020603050405020304" pitchFamily="18" charset="0"/>
+              </a:rPr>
+              <a:t>s_z</a:t>
+            </a:r>
+            <a:r>
+              <a:rPr lang="es-MX" sz="3600" kern="100" dirty="0">
+                <a:effectLst/>
+                <a:latin typeface="Calibri" panose="020F0502020204030204" pitchFamily="34" charset="0"/>
+                <a:ea typeface="Calibri" panose="020F0502020204030204" pitchFamily="34" charset="0"/>
+                <a:cs typeface="Times New Roman" panose="02020603050405020304" pitchFamily="18" charset="0"/>
+              </a:rPr>
+              <a:t> y acoplamientos cruzados </a:t>
+            </a:r>
+            <a:r>
+              <a:rPr lang="es-MX" sz="3600" kern="100" dirty="0" err="1">
+                <a:effectLst/>
+                <a:latin typeface="Calibri" panose="020F0502020204030204" pitchFamily="34" charset="0"/>
+                <a:ea typeface="Calibri" panose="020F0502020204030204" pitchFamily="34" charset="0"/>
+                <a:cs typeface="Times New Roman" panose="02020603050405020304" pitchFamily="18" charset="0"/>
+              </a:rPr>
+              <a:t>m_ij</a:t>
+            </a:r>
+            <a:r>
+              <a:rPr lang="es-MX" sz="3600" kern="100" dirty="0">
+                <a:effectLst/>
+                <a:latin typeface="Calibri" panose="020F0502020204030204" pitchFamily="34" charset="0"/>
+                <a:ea typeface="Calibri" panose="020F0502020204030204" pitchFamily="34" charset="0"/>
+                <a:cs typeface="Times New Roman" panose="02020603050405020304" pitchFamily="18" charset="0"/>
+              </a:rPr>
+              <a:t>), siendo una condición indispensable para prevenir que la deriva cuadrática degrade la estimación de posición. Sobre estas mediciones corregidas, la fórmula de </a:t>
+            </a:r>
+            <a:r>
+              <a:rPr lang="es-MX" sz="3600" kern="100" dirty="0" err="1">
+                <a:effectLst/>
+                <a:latin typeface="Calibri" panose="020F0502020204030204" pitchFamily="34" charset="0"/>
+                <a:ea typeface="Calibri" panose="020F0502020204030204" pitchFamily="34" charset="0"/>
+                <a:cs typeface="Times New Roman" panose="02020603050405020304" pitchFamily="18" charset="0"/>
+              </a:rPr>
+              <a:t>Rodrigues</a:t>
+            </a:r>
+            <a:r>
+              <a:rPr lang="es-MX" sz="3600" kern="100" dirty="0">
+                <a:effectLst/>
+                <a:latin typeface="Calibri" panose="020F0502020204030204" pitchFamily="34" charset="0"/>
+                <a:ea typeface="Calibri" panose="020F0502020204030204" pitchFamily="34" charset="0"/>
+                <a:cs typeface="Times New Roman" panose="02020603050405020304" pitchFamily="18" charset="0"/>
+              </a:rPr>
+              <a:t> ofrece una solución analítica directa en tiempo real basada únicamente en el eje k y ángulo theta, transformando los datos del marco del dispositivo (</a:t>
+            </a:r>
+            <a:r>
+              <a:rPr lang="es-MX" sz="3600" kern="100" dirty="0" err="1">
+                <a:effectLst/>
+                <a:latin typeface="Calibri" panose="020F0502020204030204" pitchFamily="34" charset="0"/>
+                <a:ea typeface="Calibri" panose="020F0502020204030204" pitchFamily="34" charset="0"/>
+                <a:cs typeface="Times New Roman" panose="02020603050405020304" pitchFamily="18" charset="0"/>
+              </a:rPr>
+              <a:t>body</a:t>
+            </a:r>
+            <a:r>
+              <a:rPr lang="es-MX" sz="3600" kern="100" dirty="0">
+                <a:effectLst/>
+                <a:latin typeface="Calibri" panose="020F0502020204030204" pitchFamily="34" charset="0"/>
+                <a:ea typeface="Calibri" panose="020F0502020204030204" pitchFamily="34" charset="0"/>
+                <a:cs typeface="Times New Roman" panose="02020603050405020304" pitchFamily="18" charset="0"/>
+              </a:rPr>
+              <a:t> </a:t>
+            </a:r>
+            <a:r>
+              <a:rPr lang="es-MX" sz="3600" kern="100" dirty="0" err="1">
+                <a:effectLst/>
+                <a:latin typeface="Calibri" panose="020F0502020204030204" pitchFamily="34" charset="0"/>
+                <a:ea typeface="Calibri" panose="020F0502020204030204" pitchFamily="34" charset="0"/>
+                <a:cs typeface="Times New Roman" panose="02020603050405020304" pitchFamily="18" charset="0"/>
+              </a:rPr>
+              <a:t>frame</a:t>
+            </a:r>
+            <a:r>
+              <a:rPr lang="es-MX" sz="3600" kern="100" dirty="0">
+                <a:effectLst/>
+                <a:latin typeface="Calibri" panose="020F0502020204030204" pitchFamily="34" charset="0"/>
+                <a:ea typeface="Calibri" panose="020F0502020204030204" pitchFamily="34" charset="0"/>
+                <a:cs typeface="Times New Roman" panose="02020603050405020304" pitchFamily="18" charset="0"/>
+              </a:rPr>
+              <a:t>) al inercial (</a:t>
+            </a:r>
+            <a:r>
+              <a:rPr lang="es-MX" sz="3600" kern="100" dirty="0" err="1">
+                <a:effectLst/>
+                <a:latin typeface="Calibri" panose="020F0502020204030204" pitchFamily="34" charset="0"/>
+                <a:ea typeface="Calibri" panose="020F0502020204030204" pitchFamily="34" charset="0"/>
+                <a:cs typeface="Times New Roman" panose="02020603050405020304" pitchFamily="18" charset="0"/>
+              </a:rPr>
+              <a:t>world</a:t>
+            </a:r>
+            <a:r>
+              <a:rPr lang="es-MX" sz="3600" kern="100" dirty="0">
+                <a:effectLst/>
+                <a:latin typeface="Calibri" panose="020F0502020204030204" pitchFamily="34" charset="0"/>
+                <a:ea typeface="Calibri" panose="020F0502020204030204" pitchFamily="34" charset="0"/>
+                <a:cs typeface="Times New Roman" panose="02020603050405020304" pitchFamily="18" charset="0"/>
+              </a:rPr>
+              <a:t> </a:t>
+            </a:r>
+            <a:r>
+              <a:rPr lang="es-MX" sz="3600" kern="100" dirty="0" err="1">
+                <a:effectLst/>
+                <a:latin typeface="Calibri" panose="020F0502020204030204" pitchFamily="34" charset="0"/>
+                <a:ea typeface="Calibri" panose="020F0502020204030204" pitchFamily="34" charset="0"/>
+                <a:cs typeface="Times New Roman" panose="02020603050405020304" pitchFamily="18" charset="0"/>
+              </a:rPr>
+              <a:t>frame</a:t>
+            </a:r>
+            <a:r>
+              <a:rPr lang="es-MX" sz="3600" kern="100" dirty="0">
+                <a:effectLst/>
+                <a:latin typeface="Calibri" panose="020F0502020204030204" pitchFamily="34" charset="0"/>
+                <a:ea typeface="Calibri" panose="020F0502020204030204" pitchFamily="34" charset="0"/>
+                <a:cs typeface="Times New Roman" panose="02020603050405020304" pitchFamily="18" charset="0"/>
+              </a:rPr>
+              <a:t>) para eliminar por completo los errores de inclinación física de montaje (tilt </a:t>
+            </a:r>
+            <a:r>
+              <a:rPr lang="es-MX" sz="3600" kern="100" dirty="0" err="1">
+                <a:effectLst/>
+                <a:latin typeface="Calibri" panose="020F0502020204030204" pitchFamily="34" charset="0"/>
+                <a:ea typeface="Calibri" panose="020F0502020204030204" pitchFamily="34" charset="0"/>
+                <a:cs typeface="Times New Roman" panose="02020603050405020304" pitchFamily="18" charset="0"/>
+              </a:rPr>
+              <a:t>offsets</a:t>
+            </a:r>
+            <a:r>
+              <a:rPr lang="es-MX" sz="3600" kern="100" dirty="0">
+                <a:effectLst/>
+                <a:latin typeface="Calibri" panose="020F0502020204030204" pitchFamily="34" charset="0"/>
+                <a:ea typeface="Calibri" panose="020F0502020204030204" pitchFamily="34" charset="0"/>
+                <a:cs typeface="Times New Roman" panose="02020603050405020304" pitchFamily="18" charset="0"/>
+              </a:rPr>
+              <a:t>).</a:t>
             </a:r>
             <a:endParaRPr lang="es-MX" dirty="0"/>
           </a:p>
@@ -5476,7 +5651,7 @@
         <p:spPr>
           <a:xfrm>
             <a:off x="17271940" y="38842446"/>
-            <a:ext cx="14091980" cy="4062651"/>
+            <a:ext cx="14091980" cy="2954655"/>
           </a:xfrm>
           <a:prstGeom prst="rect">
             <a:avLst/>
@@ -5497,42 +5672,260 @@
                 <a:effectLst/>
                 <a:latin typeface="Calibri" panose="020F0502020204030204" pitchFamily="34" charset="0"/>
               </a:rPr>
-              <a:t>[1] H. Do, H. Hua, M. Nguyen, C. Nguyen, H. Nguyen, et al., “Formation control algorithms for multiple-uavs: a comprehensive survey”, in EAI Endorsed Transactions on Industrial Networks and Intelligent Systems, vol. 8, no. 27, pp. e3-e3, 2021.</a:t>
-            </a:r>
-          </a:p>
-          <a:p>
-            <a:r>
-              <a:rPr lang="es-MX" sz="2400" b="0" i="0" u="none" strike="noStrike" dirty="0">
+              <a:t>[1] Tedaldi, David, Alberto Pretto, y Emanuele </a:t>
+            </a:r>
+            <a:r>
+              <a:rPr lang="es-MX" sz="2400" b="0" i="0" u="none" strike="noStrike" dirty="0" err="1">
                 <a:solidFill>
                   <a:srgbClr val="000000"/>
                 </a:solidFill>
                 <a:effectLst/>
                 <a:latin typeface="Calibri" panose="020F0502020204030204" pitchFamily="34" charset="0"/>
               </a:rPr>
-              <a:t>[2] E. G. Cabral-Pacheco, S. Villarreal-Reyes, A. Galaviz-Mosqueda, S. Villarreal-Reyes, R. Rivera-</a:t>
-            </a:r>
-            <a:r>
-              <a:rPr lang="es-MX" sz="2400" b="0" i="0" u="none" strike="noStrike" dirty="0" err="1">
+              <a:t>Menegatti</a:t>
+            </a:r>
+            <a:r>
+              <a:rPr lang="es-MX" sz="2400" b="0" i="0" u="none" strike="noStrike" dirty="0">
                 <a:solidFill>
                   <a:srgbClr val="000000"/>
                 </a:solidFill>
                 <a:effectLst/>
                 <a:latin typeface="Calibri" panose="020F0502020204030204" pitchFamily="34" charset="0"/>
               </a:rPr>
-              <a:t>Rodriguez</a:t>
-            </a:r>
-            <a:r>
-              <a:rPr lang="es-MX" sz="2400" b="0" i="0" u="none" strike="noStrike" dirty="0">
+              <a:t>. "A </a:t>
+            </a:r>
+            <a:r>
+              <a:rPr lang="es-MX" sz="2400" b="0" i="0" u="none" strike="noStrike" dirty="0" err="1">
                 <a:solidFill>
                   <a:srgbClr val="000000"/>
                 </a:solidFill>
                 <a:effectLst/>
                 <a:latin typeface="Calibri" panose="020F0502020204030204" pitchFamily="34" charset="0"/>
               </a:rPr>
-              <a:t>, and A. E. Perez-Ramos, “Performance analysis of multi-hop broadcast protocols for distributed uav formation control applications” IEEE Access, vol. 7, pp. 113548–113577, 2019.</a:t>
-            </a:r>
-          </a:p>
-          <a:p>
+              <a:t>Robust</a:t>
+            </a:r>
+            <a:r>
+              <a:rPr lang="es-MX" sz="2400" b="0" i="0" u="none" strike="noStrike" dirty="0">
+                <a:solidFill>
+                  <a:srgbClr val="000000"/>
+                </a:solidFill>
+                <a:effectLst/>
+                <a:latin typeface="Calibri" panose="020F0502020204030204" pitchFamily="34" charset="0"/>
+              </a:rPr>
+              <a:t> and Easy </a:t>
+            </a:r>
+            <a:r>
+              <a:rPr lang="es-MX" sz="2400" b="0" i="0" u="none" strike="noStrike" dirty="0" err="1">
+                <a:solidFill>
+                  <a:srgbClr val="000000"/>
+                </a:solidFill>
+                <a:effectLst/>
+                <a:latin typeface="Calibri" panose="020F0502020204030204" pitchFamily="34" charset="0"/>
+              </a:rPr>
+              <a:t>to</a:t>
+            </a:r>
+            <a:r>
+              <a:rPr lang="es-MX" sz="2400" b="0" i="0" u="none" strike="noStrike" dirty="0">
+                <a:solidFill>
+                  <a:srgbClr val="000000"/>
+                </a:solidFill>
+                <a:effectLst/>
+                <a:latin typeface="Calibri" panose="020F0502020204030204" pitchFamily="34" charset="0"/>
+              </a:rPr>
+              <a:t> Implement Method </a:t>
+            </a:r>
+            <a:r>
+              <a:rPr lang="es-MX" sz="2400" b="0" i="0" u="none" strike="noStrike" dirty="0" err="1">
+                <a:solidFill>
+                  <a:srgbClr val="000000"/>
+                </a:solidFill>
+                <a:effectLst/>
+                <a:latin typeface="Calibri" panose="020F0502020204030204" pitchFamily="34" charset="0"/>
+              </a:rPr>
+              <a:t>for</a:t>
+            </a:r>
+            <a:r>
+              <a:rPr lang="es-MX" sz="2400" b="0" i="0" u="none" strike="noStrike" dirty="0">
+                <a:solidFill>
+                  <a:srgbClr val="000000"/>
+                </a:solidFill>
+                <a:effectLst/>
+                <a:latin typeface="Calibri" panose="020F0502020204030204" pitchFamily="34" charset="0"/>
+              </a:rPr>
+              <a:t> IMU </a:t>
+            </a:r>
+            <a:r>
+              <a:rPr lang="es-MX" sz="2400" b="0" i="0" u="none" strike="noStrike" dirty="0" err="1">
+                <a:solidFill>
+                  <a:srgbClr val="000000"/>
+                </a:solidFill>
+                <a:effectLst/>
+                <a:latin typeface="Calibri" panose="020F0502020204030204" pitchFamily="34" charset="0"/>
+              </a:rPr>
+              <a:t>Calibration</a:t>
+            </a:r>
+            <a:r>
+              <a:rPr lang="es-MX" sz="2400" b="0" i="0" u="none" strike="noStrike" dirty="0">
+                <a:solidFill>
+                  <a:srgbClr val="000000"/>
+                </a:solidFill>
+                <a:effectLst/>
+                <a:latin typeface="Calibri" panose="020F0502020204030204" pitchFamily="34" charset="0"/>
+              </a:rPr>
+              <a:t> </a:t>
+            </a:r>
+            <a:r>
+              <a:rPr lang="es-MX" sz="2400" b="0" i="0" u="none" strike="noStrike" dirty="0" err="1">
+                <a:solidFill>
+                  <a:srgbClr val="000000"/>
+                </a:solidFill>
+                <a:effectLst/>
+                <a:latin typeface="Calibri" panose="020F0502020204030204" pitchFamily="34" charset="0"/>
+              </a:rPr>
+              <a:t>without</a:t>
+            </a:r>
+            <a:r>
+              <a:rPr lang="es-MX" sz="2400" b="0" i="0" u="none" strike="noStrike" dirty="0">
+                <a:solidFill>
+                  <a:srgbClr val="000000"/>
+                </a:solidFill>
+                <a:effectLst/>
+                <a:latin typeface="Calibri" panose="020F0502020204030204" pitchFamily="34" charset="0"/>
+              </a:rPr>
+              <a:t> </a:t>
+            </a:r>
+            <a:r>
+              <a:rPr lang="es-MX" sz="2400" b="0" i="0" u="none" strike="noStrike" dirty="0" err="1">
+                <a:solidFill>
+                  <a:srgbClr val="000000"/>
+                </a:solidFill>
+                <a:effectLst/>
+                <a:latin typeface="Calibri" panose="020F0502020204030204" pitchFamily="34" charset="0"/>
+              </a:rPr>
+              <a:t>External</a:t>
+            </a:r>
+            <a:r>
+              <a:rPr lang="es-MX" sz="2400" b="0" i="0" u="none" strike="noStrike" dirty="0">
+                <a:solidFill>
+                  <a:srgbClr val="000000"/>
+                </a:solidFill>
+                <a:effectLst/>
+                <a:latin typeface="Calibri" panose="020F0502020204030204" pitchFamily="34" charset="0"/>
+              </a:rPr>
+              <a:t> </a:t>
+            </a:r>
+            <a:r>
+              <a:rPr lang="es-MX" sz="2400" b="0" i="0" u="none" strike="noStrike" dirty="0" err="1">
+                <a:solidFill>
+                  <a:srgbClr val="000000"/>
+                </a:solidFill>
+                <a:effectLst/>
+                <a:latin typeface="Calibri" panose="020F0502020204030204" pitchFamily="34" charset="0"/>
+              </a:rPr>
+              <a:t>Equipments</a:t>
+            </a:r>
+            <a:r>
+              <a:rPr lang="es-MX" sz="2400" b="0" i="0" u="none" strike="noStrike" dirty="0">
+                <a:solidFill>
+                  <a:srgbClr val="000000"/>
+                </a:solidFill>
+                <a:effectLst/>
+                <a:latin typeface="Calibri" panose="020F0502020204030204" pitchFamily="34" charset="0"/>
+              </a:rPr>
+              <a:t>." En 2014 IEEE International </a:t>
+            </a:r>
+            <a:r>
+              <a:rPr lang="es-MX" sz="2400" b="0" i="0" u="none" strike="noStrike" dirty="0" err="1">
+                <a:solidFill>
+                  <a:srgbClr val="000000"/>
+                </a:solidFill>
+                <a:effectLst/>
+                <a:latin typeface="Calibri" panose="020F0502020204030204" pitchFamily="34" charset="0"/>
+              </a:rPr>
+              <a:t>Conference</a:t>
+            </a:r>
+            <a:r>
+              <a:rPr lang="es-MX" sz="2400" b="0" i="0" u="none" strike="noStrike" dirty="0">
+                <a:solidFill>
+                  <a:srgbClr val="000000"/>
+                </a:solidFill>
+                <a:effectLst/>
+                <a:latin typeface="Calibri" panose="020F0502020204030204" pitchFamily="34" charset="0"/>
+              </a:rPr>
+              <a:t> </a:t>
+            </a:r>
+            <a:r>
+              <a:rPr lang="es-MX" sz="2400" b="0" i="0" u="none" strike="noStrike" dirty="0" err="1">
+                <a:solidFill>
+                  <a:srgbClr val="000000"/>
+                </a:solidFill>
+                <a:effectLst/>
+                <a:latin typeface="Calibri" panose="020F0502020204030204" pitchFamily="34" charset="0"/>
+              </a:rPr>
+              <a:t>on</a:t>
+            </a:r>
+            <a:r>
+              <a:rPr lang="es-MX" sz="2400" b="0" i="0" u="none" strike="noStrike" dirty="0">
+                <a:solidFill>
+                  <a:srgbClr val="000000"/>
+                </a:solidFill>
+                <a:effectLst/>
+                <a:latin typeface="Calibri" panose="020F0502020204030204" pitchFamily="34" charset="0"/>
+              </a:rPr>
+              <a:t> </a:t>
+            </a:r>
+            <a:r>
+              <a:rPr lang="es-MX" sz="2400" b="0" i="0" u="none" strike="noStrike" dirty="0" err="1">
+                <a:solidFill>
+                  <a:srgbClr val="000000"/>
+                </a:solidFill>
+                <a:effectLst/>
+                <a:latin typeface="Calibri" panose="020F0502020204030204" pitchFamily="34" charset="0"/>
+              </a:rPr>
+              <a:t>Robotics</a:t>
+            </a:r>
+            <a:r>
+              <a:rPr lang="es-MX" sz="2400" b="0" i="0" u="none" strike="noStrike" dirty="0">
+                <a:solidFill>
+                  <a:srgbClr val="000000"/>
+                </a:solidFill>
+                <a:effectLst/>
+                <a:latin typeface="Calibri" panose="020F0502020204030204" pitchFamily="34" charset="0"/>
+              </a:rPr>
+              <a:t> and </a:t>
+            </a:r>
+            <a:r>
+              <a:rPr lang="es-MX" sz="2400" b="0" i="0" u="none" strike="noStrike" dirty="0" err="1">
+                <a:solidFill>
+                  <a:srgbClr val="000000"/>
+                </a:solidFill>
+                <a:effectLst/>
+                <a:latin typeface="Calibri" panose="020F0502020204030204" pitchFamily="34" charset="0"/>
+              </a:rPr>
+              <a:t>Automation</a:t>
+            </a:r>
+            <a:r>
+              <a:rPr lang="es-MX" sz="2400" b="0" i="0" u="none" strike="noStrike" dirty="0">
+                <a:solidFill>
+                  <a:srgbClr val="000000"/>
+                </a:solidFill>
+                <a:effectLst/>
+                <a:latin typeface="Calibri" panose="020F0502020204030204" pitchFamily="34" charset="0"/>
+              </a:rPr>
+              <a:t> (ICRA), 3042–3049. Hong Kong, China: IEEE, 2014.</a:t>
+            </a:r>
+          </a:p>
+          <a:p>
+            <a:r>
+              <a:rPr lang="es-MX" sz="2400" b="0" i="0" u="none" strike="noStrike" dirty="0">
+                <a:solidFill>
+                  <a:srgbClr val="000000"/>
+                </a:solidFill>
+                <a:effectLst/>
+                <a:latin typeface="Calibri" panose="020F0502020204030204" pitchFamily="34" charset="0"/>
+              </a:rPr>
+              <a:t>[2</a:t>
+            </a:r>
             <a:r>
               <a:rPr lang="es-MX" sz="2400" dirty="0">
                 <a:solidFill>
@@ -5540,7 +5933,197 @@
                 </a:solidFill>
                 <a:latin typeface="Calibri" panose="020F0502020204030204" pitchFamily="34" charset="0"/>
               </a:rPr>
-              <a:t>[3] D. Mellinger and V. Kumar, “Minimum snap trajectory generation and control for quadrotors," in Robotics and Automation (ICRA), 2011 IEEE International Conference on, pp. 2520-2525, IEEE, 2011.</a:t>
+              <a:t>] </a:t>
+            </a:r>
+            <a:r>
+              <a:rPr lang="es-MX" sz="2400" b="0" i="0" u="none" strike="noStrike" dirty="0">
+                <a:solidFill>
+                  <a:srgbClr val="000000"/>
+                </a:solidFill>
+                <a:effectLst/>
+                <a:latin typeface="Calibri" panose="020F0502020204030204" pitchFamily="34" charset="0"/>
+              </a:rPr>
+              <a:t>Skog, Isaac, y Peter Händel. "</a:t>
+            </a:r>
+            <a:r>
+              <a:rPr lang="es-MX" sz="2400" b="0" i="0" u="none" strike="noStrike" dirty="0" err="1">
+                <a:solidFill>
+                  <a:srgbClr val="000000"/>
+                </a:solidFill>
+                <a:effectLst/>
+                <a:latin typeface="Calibri" panose="020F0502020204030204" pitchFamily="34" charset="0"/>
+              </a:rPr>
+              <a:t>Calibration</a:t>
+            </a:r>
+            <a:r>
+              <a:rPr lang="es-MX" sz="2400" b="0" i="0" u="none" strike="noStrike" dirty="0">
+                <a:solidFill>
+                  <a:srgbClr val="000000"/>
+                </a:solidFill>
+                <a:effectLst/>
+                <a:latin typeface="Calibri" panose="020F0502020204030204" pitchFamily="34" charset="0"/>
+              </a:rPr>
+              <a:t> </a:t>
+            </a:r>
+            <a:r>
+              <a:rPr lang="es-MX" sz="2400" b="0" i="0" u="none" strike="noStrike" dirty="0" err="1">
+                <a:solidFill>
+                  <a:srgbClr val="000000"/>
+                </a:solidFill>
+                <a:effectLst/>
+                <a:latin typeface="Calibri" panose="020F0502020204030204" pitchFamily="34" charset="0"/>
+              </a:rPr>
+              <a:t>of</a:t>
+            </a:r>
+            <a:r>
+              <a:rPr lang="es-MX" sz="2400" b="0" i="0" u="none" strike="noStrike" dirty="0">
+                <a:solidFill>
+                  <a:srgbClr val="000000"/>
+                </a:solidFill>
+                <a:effectLst/>
+                <a:latin typeface="Calibri" panose="020F0502020204030204" pitchFamily="34" charset="0"/>
+              </a:rPr>
+              <a:t> a MEMS </a:t>
+            </a:r>
+            <a:r>
+              <a:rPr lang="es-MX" sz="2400" b="0" i="0" u="none" strike="noStrike" dirty="0" err="1">
+                <a:solidFill>
+                  <a:srgbClr val="000000"/>
+                </a:solidFill>
+                <a:effectLst/>
+                <a:latin typeface="Calibri" panose="020F0502020204030204" pitchFamily="34" charset="0"/>
+              </a:rPr>
+              <a:t>Inertial</a:t>
+            </a:r>
+            <a:r>
+              <a:rPr lang="es-MX" sz="2400" b="0" i="0" u="none" strike="noStrike" dirty="0">
+                <a:solidFill>
+                  <a:srgbClr val="000000"/>
+                </a:solidFill>
+                <a:effectLst/>
+                <a:latin typeface="Calibri" panose="020F0502020204030204" pitchFamily="34" charset="0"/>
+              </a:rPr>
+              <a:t> </a:t>
+            </a:r>
+            <a:r>
+              <a:rPr lang="es-MX" sz="2400" b="0" i="0" u="none" strike="noStrike" dirty="0" err="1">
+                <a:solidFill>
+                  <a:srgbClr val="000000"/>
+                </a:solidFill>
+                <a:effectLst/>
+                <a:latin typeface="Calibri" panose="020F0502020204030204" pitchFamily="34" charset="0"/>
+              </a:rPr>
+              <a:t>Measurement</a:t>
+            </a:r>
+            <a:r>
+              <a:rPr lang="es-MX" sz="2400" b="0" i="0" u="none" strike="noStrike" dirty="0">
+                <a:solidFill>
+                  <a:srgbClr val="000000"/>
+                </a:solidFill>
+                <a:effectLst/>
+                <a:latin typeface="Calibri" panose="020F0502020204030204" pitchFamily="34" charset="0"/>
+              </a:rPr>
+              <a:t> </a:t>
+            </a:r>
+            <a:r>
+              <a:rPr lang="es-MX" sz="2400" b="0" i="0" u="none" strike="noStrike" dirty="0" err="1">
+                <a:solidFill>
+                  <a:srgbClr val="000000"/>
+                </a:solidFill>
+                <a:effectLst/>
+                <a:latin typeface="Calibri" panose="020F0502020204030204" pitchFamily="34" charset="0"/>
+              </a:rPr>
+              <a:t>Unit</a:t>
+            </a:r>
+            <a:r>
+              <a:rPr lang="es-MX" sz="2400" b="0" i="0" u="none" strike="noStrike" dirty="0">
+                <a:solidFill>
+                  <a:srgbClr val="000000"/>
+                </a:solidFill>
+                <a:effectLst/>
+                <a:latin typeface="Calibri" panose="020F0502020204030204" pitchFamily="34" charset="0"/>
+              </a:rPr>
+              <a:t>." En XVII IMEKO World Congress: </a:t>
+            </a:r>
+            <a:r>
+              <a:rPr lang="es-MX" sz="2400" b="0" i="0" u="none" strike="noStrike" dirty="0" err="1">
+                <a:solidFill>
+                  <a:srgbClr val="000000"/>
+                </a:solidFill>
+                <a:effectLst/>
+                <a:latin typeface="Calibri" panose="020F0502020204030204" pitchFamily="34" charset="0"/>
+              </a:rPr>
+              <a:t>Metrology</a:t>
+            </a:r>
+            <a:r>
+              <a:rPr lang="es-MX" sz="2400" b="0" i="0" u="none" strike="noStrike" dirty="0">
+                <a:solidFill>
+                  <a:srgbClr val="000000"/>
+                </a:solidFill>
+                <a:effectLst/>
+                <a:latin typeface="Calibri" panose="020F0502020204030204" pitchFamily="34" charset="0"/>
+              </a:rPr>
+              <a:t> </a:t>
+            </a:r>
+            <a:r>
+              <a:rPr lang="es-MX" sz="2400" b="0" i="0" u="none" strike="noStrike" dirty="0" err="1">
+                <a:solidFill>
+                  <a:srgbClr val="000000"/>
+                </a:solidFill>
+                <a:effectLst/>
+                <a:latin typeface="Calibri" panose="020F0502020204030204" pitchFamily="34" charset="0"/>
+              </a:rPr>
+              <a:t>for</a:t>
+            </a:r>
+            <a:r>
+              <a:rPr lang="es-MX" sz="2400" b="0" i="0" u="none" strike="noStrike" dirty="0">
+                <a:solidFill>
+                  <a:srgbClr val="000000"/>
+                </a:solidFill>
+                <a:effectLst/>
+                <a:latin typeface="Calibri" panose="020F0502020204030204" pitchFamily="34" charset="0"/>
+              </a:rPr>
+              <a:t> a </a:t>
+            </a:r>
+            <a:r>
+              <a:rPr lang="es-MX" sz="2400" b="0" i="0" u="none" strike="noStrike" dirty="0" err="1">
+                <a:solidFill>
+                  <a:srgbClr val="000000"/>
+                </a:solidFill>
+                <a:effectLst/>
+                <a:latin typeface="Calibri" panose="020F0502020204030204" pitchFamily="34" charset="0"/>
+              </a:rPr>
+              <a:t>Sustainable</a:t>
+            </a:r>
+            <a:r>
+              <a:rPr lang="es-MX" sz="2400" b="0" i="0" u="none" strike="noStrike" dirty="0">
+                <a:solidFill>
+                  <a:srgbClr val="000000"/>
+                </a:solidFill>
+                <a:effectLst/>
+                <a:latin typeface="Calibri" panose="020F0502020204030204" pitchFamily="34" charset="0"/>
+              </a:rPr>
+              <a:t> </a:t>
+            </a:r>
+            <a:r>
+              <a:rPr lang="es-MX" sz="2400" b="0" i="0" u="none" strike="noStrike" dirty="0" err="1">
+                <a:solidFill>
+                  <a:srgbClr val="000000"/>
+                </a:solidFill>
+                <a:effectLst/>
+                <a:latin typeface="Calibri" panose="020F0502020204030204" pitchFamily="34" charset="0"/>
+              </a:rPr>
+              <a:t>Development</a:t>
+            </a:r>
+            <a:r>
+              <a:rPr lang="es-MX" sz="2400" b="0" i="0" u="none" strike="noStrike" dirty="0">
+                <a:solidFill>
+                  <a:srgbClr val="000000"/>
+                </a:solidFill>
+                <a:effectLst/>
+                <a:latin typeface="Calibri" panose="020F0502020204030204" pitchFamily="34" charset="0"/>
+              </a:rPr>
+              <a:t>, 1–6. Río de Janeiro, Brasil, 2006..</a:t>
             </a:r>
           </a:p>
           <a:p>
@@ -5562,651 +6145,6 @@
           </a:p>
         </p:txBody>
       </p:sp>
-      <p:grpSp>
-        <p:nvGrpSpPr>
-          <p:cNvPr id="135" name="Grupo 134">
-            <a:extLst>
-              <a:ext uri="{FF2B5EF4-FFF2-40B4-BE49-F238E27FC236}">
-                <a16:creationId xmlns:a16="http://schemas.microsoft.com/office/drawing/2014/main" id="{CA835FFF-6A5C-D6E7-826D-E9727E60454F}"/>
-              </a:ext>
-            </a:extLst>
-          </p:cNvPr>
-          <p:cNvGrpSpPr/>
-          <p:nvPr/>
-        </p:nvGrpSpPr>
-        <p:grpSpPr>
-          <a:xfrm>
-            <a:off x="18716337" y="16048874"/>
-            <a:ext cx="11000045" cy="4702698"/>
-            <a:chOff x="348831" y="1082684"/>
-            <a:chExt cx="11000045" cy="4702698"/>
-          </a:xfrm>
-        </p:grpSpPr>
-        <p:sp>
-          <p:nvSpPr>
-            <p:cNvPr id="136" name="CuadroTexto 135">
-              <a:extLst>
-                <a:ext uri="{FF2B5EF4-FFF2-40B4-BE49-F238E27FC236}">
-                  <a16:creationId xmlns:a16="http://schemas.microsoft.com/office/drawing/2014/main" id="{BF14B87F-7882-3659-7D5B-70AD6B987EB2}"/>
-                </a:ext>
-              </a:extLst>
-            </p:cNvPr>
-            <p:cNvSpPr txBox="1"/>
-            <p:nvPr/>
-          </p:nvSpPr>
-          <p:spPr>
-            <a:xfrm>
-              <a:off x="348832" y="2606721"/>
-              <a:ext cx="3547409" cy="1077218"/>
-            </a:xfrm>
-            <a:prstGeom prst="rect">
-              <a:avLst/>
-            </a:prstGeom>
-            <a:solidFill>
-              <a:schemeClr val="bg1"/>
-            </a:solidFill>
-            <a:ln w="38100"/>
-          </p:spPr>
-          <p:style>
-            <a:lnRef idx="2">
-              <a:schemeClr val="dk1"/>
-            </a:lnRef>
-            <a:fillRef idx="1">
-              <a:schemeClr val="lt1"/>
-            </a:fillRef>
-            <a:effectRef idx="0">
-              <a:schemeClr val="dk1"/>
-            </a:effectRef>
-            <a:fontRef idx="minor">
-              <a:schemeClr val="dk1"/>
-            </a:fontRef>
-          </p:style>
-          <p:txBody>
-            <a:bodyPr wrap="square" rtlCol="0">
-              <a:spAutoFit/>
-            </a:bodyPr>
-            <a:lstStyle/>
-            <a:p>
-              <a:pPr algn="ctr"/>
-              <a:r>
-                <a:rPr lang="es-MX" sz="3200" b="1" dirty="0"/>
-                <a:t>OMNeT++</a:t>
-              </a:r>
-            </a:p>
-            <a:p>
-              <a:pPr algn="ctr"/>
-              <a:r>
-                <a:rPr lang="es-MX" sz="3200" b="1" dirty="0"/>
-                <a:t>Simulador de Red</a:t>
-              </a:r>
-            </a:p>
-          </p:txBody>
-        </p:sp>
-        <p:sp>
-          <p:nvSpPr>
-            <p:cNvPr id="137" name="CuadroTexto 136">
-              <a:extLst>
-                <a:ext uri="{FF2B5EF4-FFF2-40B4-BE49-F238E27FC236}">
-                  <a16:creationId xmlns:a16="http://schemas.microsoft.com/office/drawing/2014/main" id="{5335A06A-D779-4A95-0126-BB6FDDAD951D}"/>
-                </a:ext>
-              </a:extLst>
-            </p:cNvPr>
-            <p:cNvSpPr txBox="1"/>
-            <p:nvPr/>
-          </p:nvSpPr>
-          <p:spPr>
-            <a:xfrm>
-              <a:off x="348831" y="3690622"/>
-              <a:ext cx="3547409" cy="1569660"/>
-            </a:xfrm>
-            <a:prstGeom prst="rect">
-              <a:avLst/>
-            </a:prstGeom>
-            <a:solidFill>
-              <a:schemeClr val="bg1"/>
-            </a:solidFill>
-          </p:spPr>
-          <p:style>
-            <a:lnRef idx="2">
-              <a:schemeClr val="dk1"/>
-            </a:lnRef>
-            <a:fillRef idx="1">
-              <a:schemeClr val="lt1"/>
-            </a:fillRef>
-            <a:effectRef idx="0">
-              <a:schemeClr val="dk1"/>
-            </a:effectRef>
-            <a:fontRef idx="minor">
-              <a:schemeClr val="dk1"/>
-            </a:fontRef>
-          </p:style>
-          <p:txBody>
-            <a:bodyPr wrap="square" rtlCol="0">
-              <a:spAutoFit/>
-            </a:bodyPr>
-            <a:lstStyle/>
-            <a:p>
-              <a:pPr algn="ctr"/>
-              <a:r>
-                <a:rPr lang="es-MX" sz="3200" dirty="0"/>
-                <a:t>Eventos de la red y actualiza la posición de los nodos.</a:t>
-              </a:r>
-            </a:p>
-          </p:txBody>
-        </p:sp>
-        <p:sp>
-          <p:nvSpPr>
-            <p:cNvPr id="138" name="CuadroTexto 137">
-              <a:extLst>
-                <a:ext uri="{FF2B5EF4-FFF2-40B4-BE49-F238E27FC236}">
-                  <a16:creationId xmlns:a16="http://schemas.microsoft.com/office/drawing/2014/main" id="{5A01D9C7-2F1F-FB0C-2766-3F7050D980F6}"/>
-                </a:ext>
-              </a:extLst>
-            </p:cNvPr>
-            <p:cNvSpPr txBox="1"/>
-            <p:nvPr/>
-          </p:nvSpPr>
-          <p:spPr>
-            <a:xfrm>
-              <a:off x="7665484" y="2620369"/>
-              <a:ext cx="3546000" cy="1077218"/>
-            </a:xfrm>
-            <a:prstGeom prst="rect">
-              <a:avLst/>
-            </a:prstGeom>
-            <a:solidFill>
-              <a:schemeClr val="bg1"/>
-            </a:solidFill>
-            <a:ln w="38100"/>
-          </p:spPr>
-          <p:style>
-            <a:lnRef idx="2">
-              <a:schemeClr val="dk1"/>
-            </a:lnRef>
-            <a:fillRef idx="1">
-              <a:schemeClr val="lt1"/>
-            </a:fillRef>
-            <a:effectRef idx="0">
-              <a:schemeClr val="dk1"/>
-            </a:effectRef>
-            <a:fontRef idx="minor">
-              <a:schemeClr val="dk1"/>
-            </a:fontRef>
-          </p:style>
-          <p:txBody>
-            <a:bodyPr wrap="square" rtlCol="0">
-              <a:spAutoFit/>
-            </a:bodyPr>
-            <a:lstStyle/>
-            <a:p>
-              <a:pPr algn="ctr"/>
-              <a:r>
-                <a:rPr lang="es-MX" sz="3200" b="1" dirty="0"/>
-                <a:t>Scilab</a:t>
-              </a:r>
-            </a:p>
-            <a:p>
-              <a:pPr algn="ctr"/>
-              <a:r>
-                <a:rPr lang="es-MX" sz="3200" b="1" dirty="0"/>
-                <a:t>Simulador de Vuelo</a:t>
-              </a:r>
-            </a:p>
-          </p:txBody>
-        </p:sp>
-        <p:sp>
-          <p:nvSpPr>
-            <p:cNvPr id="139" name="CuadroTexto 138">
-              <a:extLst>
-                <a:ext uri="{FF2B5EF4-FFF2-40B4-BE49-F238E27FC236}">
-                  <a16:creationId xmlns:a16="http://schemas.microsoft.com/office/drawing/2014/main" id="{7D3724EC-76AC-96E2-9471-F8E9AB722719}"/>
-                </a:ext>
-              </a:extLst>
-            </p:cNvPr>
-            <p:cNvSpPr txBox="1"/>
-            <p:nvPr/>
-          </p:nvSpPr>
-          <p:spPr>
-            <a:xfrm>
-              <a:off x="7676370" y="3723279"/>
-              <a:ext cx="3546000" cy="2062103"/>
-            </a:xfrm>
-            <a:prstGeom prst="rect">
-              <a:avLst/>
-            </a:prstGeom>
-            <a:solidFill>
-              <a:schemeClr val="bg1"/>
-            </a:solidFill>
-          </p:spPr>
-          <p:style>
-            <a:lnRef idx="2">
-              <a:schemeClr val="dk1"/>
-            </a:lnRef>
-            <a:fillRef idx="1">
-              <a:schemeClr val="lt1"/>
-            </a:fillRef>
-            <a:effectRef idx="0">
-              <a:schemeClr val="dk1"/>
-            </a:effectRef>
-            <a:fontRef idx="minor">
-              <a:schemeClr val="dk1"/>
-            </a:fontRef>
-          </p:style>
-          <p:txBody>
-            <a:bodyPr wrap="square" rtlCol="0">
-              <a:spAutoFit/>
-            </a:bodyPr>
-            <a:lstStyle/>
-            <a:p>
-              <a:pPr algn="ctr"/>
-              <a:r>
-                <a:rPr lang="es-MX" sz="3200" dirty="0"/>
-                <a:t>Calcula la posición de los UAVs según esquemas de control.</a:t>
-              </a:r>
-            </a:p>
-          </p:txBody>
-        </p:sp>
-        <p:sp>
-          <p:nvSpPr>
-            <p:cNvPr id="140" name="CuadroTexto 139">
-              <a:extLst>
-                <a:ext uri="{FF2B5EF4-FFF2-40B4-BE49-F238E27FC236}">
-                  <a16:creationId xmlns:a16="http://schemas.microsoft.com/office/drawing/2014/main" id="{63CC4056-6582-EB04-3AAC-73B6EDD22EA5}"/>
-                </a:ext>
-              </a:extLst>
-            </p:cNvPr>
-            <p:cNvSpPr txBox="1"/>
-            <p:nvPr/>
-          </p:nvSpPr>
-          <p:spPr>
-            <a:xfrm>
-              <a:off x="506096" y="1238532"/>
-              <a:ext cx="2588517" cy="461665"/>
-            </a:xfrm>
-            <a:prstGeom prst="rect">
-              <a:avLst/>
-            </a:prstGeom>
-            <a:noFill/>
-            <a:ln>
-              <a:noFill/>
-            </a:ln>
-          </p:spPr>
-          <p:style>
-            <a:lnRef idx="2">
-              <a:schemeClr val="dk1"/>
-            </a:lnRef>
-            <a:fillRef idx="1">
-              <a:schemeClr val="lt1"/>
-            </a:fillRef>
-            <a:effectRef idx="0">
-              <a:schemeClr val="dk1"/>
-            </a:effectRef>
-            <a:fontRef idx="minor">
-              <a:schemeClr val="dk1"/>
-            </a:fontRef>
-          </p:style>
-          <p:txBody>
-            <a:bodyPr wrap="square" rtlCol="0">
-              <a:spAutoFit/>
-            </a:bodyPr>
-            <a:lstStyle/>
-            <a:p>
-              <a:pPr algn="ctr"/>
-              <a:r>
-                <a:rPr lang="es-MX" sz="2400" dirty="0"/>
-                <a:t>Parámetros de Red</a:t>
-              </a:r>
-            </a:p>
-          </p:txBody>
-        </p:sp>
-        <p:sp>
-          <p:nvSpPr>
-            <p:cNvPr id="141" name="CuadroTexto 140">
-              <a:extLst>
-                <a:ext uri="{FF2B5EF4-FFF2-40B4-BE49-F238E27FC236}">
-                  <a16:creationId xmlns:a16="http://schemas.microsoft.com/office/drawing/2014/main" id="{AC526E07-9B19-068D-B7C4-3FDE54AB1F38}"/>
-                </a:ext>
-              </a:extLst>
-            </p:cNvPr>
-            <p:cNvSpPr txBox="1"/>
-            <p:nvPr/>
-          </p:nvSpPr>
-          <p:spPr>
-            <a:xfrm>
-              <a:off x="8585896" y="1238532"/>
-              <a:ext cx="2762980" cy="461665"/>
-            </a:xfrm>
-            <a:prstGeom prst="rect">
-              <a:avLst/>
-            </a:prstGeom>
-            <a:noFill/>
-            <a:ln>
-              <a:noFill/>
-            </a:ln>
-          </p:spPr>
-          <p:style>
-            <a:lnRef idx="2">
-              <a:schemeClr val="dk1"/>
-            </a:lnRef>
-            <a:fillRef idx="1">
-              <a:schemeClr val="lt1"/>
-            </a:fillRef>
-            <a:effectRef idx="0">
-              <a:schemeClr val="dk1"/>
-            </a:effectRef>
-            <a:fontRef idx="minor">
-              <a:schemeClr val="dk1"/>
-            </a:fontRef>
-          </p:style>
-          <p:txBody>
-            <a:bodyPr wrap="square" rtlCol="0">
-              <a:spAutoFit/>
-            </a:bodyPr>
-            <a:lstStyle/>
-            <a:p>
-              <a:pPr algn="ctr"/>
-              <a:r>
-                <a:rPr lang="es-MX" sz="2400" dirty="0"/>
-                <a:t>Parámetros de Vuelo</a:t>
-              </a:r>
-            </a:p>
-          </p:txBody>
-        </p:sp>
-        <p:cxnSp>
-          <p:nvCxnSpPr>
-            <p:cNvPr id="142" name="Conector recto de flecha 141">
-              <a:extLst>
-                <a:ext uri="{FF2B5EF4-FFF2-40B4-BE49-F238E27FC236}">
-                  <a16:creationId xmlns:a16="http://schemas.microsoft.com/office/drawing/2014/main" id="{94A94F47-6B3F-3A26-8E92-A5415CF1BD08}"/>
-                </a:ext>
-              </a:extLst>
-            </p:cNvPr>
-            <p:cNvCxnSpPr>
-              <a:cxnSpLocks/>
-              <a:stCxn id="140" idx="2"/>
-              <a:endCxn id="136" idx="0"/>
-            </p:cNvCxnSpPr>
-            <p:nvPr/>
-          </p:nvCxnSpPr>
-          <p:spPr>
-            <a:xfrm>
-              <a:off x="1800355" y="1700197"/>
-              <a:ext cx="322182" cy="906524"/>
-            </a:xfrm>
-            <a:prstGeom prst="straightConnector1">
-              <a:avLst/>
-            </a:prstGeom>
-            <a:ln w="38100">
-              <a:tailEnd type="triangle" w="lg" len="lg"/>
-            </a:ln>
-          </p:spPr>
-          <p:style>
-            <a:lnRef idx="1">
-              <a:schemeClr val="dk1"/>
-            </a:lnRef>
-            <a:fillRef idx="0">
-              <a:schemeClr val="dk1"/>
-            </a:fillRef>
-            <a:effectRef idx="0">
-              <a:schemeClr val="dk1"/>
-            </a:effectRef>
-            <a:fontRef idx="minor">
-              <a:schemeClr val="tx1"/>
-            </a:fontRef>
-          </p:style>
-        </p:cxnSp>
-        <p:cxnSp>
-          <p:nvCxnSpPr>
-            <p:cNvPr id="143" name="Conector recto de flecha 142">
-              <a:extLst>
-                <a:ext uri="{FF2B5EF4-FFF2-40B4-BE49-F238E27FC236}">
-                  <a16:creationId xmlns:a16="http://schemas.microsoft.com/office/drawing/2014/main" id="{0E71E09E-1C1E-86B3-7EAB-09814A03F55C}"/>
-                </a:ext>
-              </a:extLst>
-            </p:cNvPr>
-            <p:cNvCxnSpPr>
-              <a:cxnSpLocks/>
-              <a:stCxn id="141" idx="2"/>
-              <a:endCxn id="138" idx="0"/>
-            </p:cNvCxnSpPr>
-            <p:nvPr/>
-          </p:nvCxnSpPr>
-          <p:spPr>
-            <a:xfrm flipH="1">
-              <a:off x="9438484" y="1700197"/>
-              <a:ext cx="528902" cy="920172"/>
-            </a:xfrm>
-            <a:prstGeom prst="straightConnector1">
-              <a:avLst/>
-            </a:prstGeom>
-            <a:ln w="38100">
-              <a:tailEnd type="triangle" w="lg" len="lg"/>
-            </a:ln>
-          </p:spPr>
-          <p:style>
-            <a:lnRef idx="1">
-              <a:schemeClr val="dk1"/>
-            </a:lnRef>
-            <a:fillRef idx="0">
-              <a:schemeClr val="dk1"/>
-            </a:fillRef>
-            <a:effectRef idx="0">
-              <a:schemeClr val="dk1"/>
-            </a:effectRef>
-            <a:fontRef idx="minor">
-              <a:schemeClr val="tx1"/>
-            </a:fontRef>
-          </p:style>
-        </p:cxnSp>
-        <p:sp>
-          <p:nvSpPr>
-            <p:cNvPr id="144" name="Arco 143">
-              <a:extLst>
-                <a:ext uri="{FF2B5EF4-FFF2-40B4-BE49-F238E27FC236}">
-                  <a16:creationId xmlns:a16="http://schemas.microsoft.com/office/drawing/2014/main" id="{AB6EF7C9-A158-53E4-1B13-DB4E608A8ABC}"/>
-                </a:ext>
-              </a:extLst>
-            </p:cNvPr>
-            <p:cNvSpPr/>
-            <p:nvPr/>
-          </p:nvSpPr>
-          <p:spPr>
-            <a:xfrm>
-              <a:off x="3910671" y="2324924"/>
-              <a:ext cx="3678848" cy="824113"/>
-            </a:xfrm>
-            <a:prstGeom prst="arc">
-              <a:avLst>
-                <a:gd name="adj1" fmla="val 10986789"/>
-                <a:gd name="adj2" fmla="val 0"/>
-              </a:avLst>
-            </a:prstGeom>
-            <a:ln w="38100">
-              <a:headEnd type="none" w="med" len="med"/>
-              <a:tailEnd type="triangle" w="lg" len="lg"/>
-            </a:ln>
-          </p:spPr>
-          <p:style>
-            <a:lnRef idx="1">
-              <a:schemeClr val="dk1"/>
-            </a:lnRef>
-            <a:fillRef idx="0">
-              <a:schemeClr val="dk1"/>
-            </a:fillRef>
-            <a:effectRef idx="0">
-              <a:schemeClr val="dk1"/>
-            </a:effectRef>
-            <a:fontRef idx="minor">
-              <a:schemeClr val="tx1"/>
-            </a:fontRef>
-          </p:style>
-          <p:txBody>
-            <a:bodyPr rtlCol="0" anchor="ctr"/>
-            <a:lstStyle/>
-            <a:p>
-              <a:pPr algn="ctr"/>
-              <a:endParaRPr lang="es-MX"/>
-            </a:p>
-          </p:txBody>
-        </p:sp>
-        <p:sp>
-          <p:nvSpPr>
-            <p:cNvPr id="145" name="Arco 144">
-              <a:extLst>
-                <a:ext uri="{FF2B5EF4-FFF2-40B4-BE49-F238E27FC236}">
-                  <a16:creationId xmlns:a16="http://schemas.microsoft.com/office/drawing/2014/main" id="{487C61DA-58AE-42E8-6A85-729E2BE91749}"/>
-                </a:ext>
-              </a:extLst>
-            </p:cNvPr>
-            <p:cNvSpPr/>
-            <p:nvPr/>
-          </p:nvSpPr>
-          <p:spPr>
-            <a:xfrm rot="10800000">
-              <a:off x="3934220" y="2866509"/>
-              <a:ext cx="3655299" cy="824113"/>
-            </a:xfrm>
-            <a:prstGeom prst="arc">
-              <a:avLst>
-                <a:gd name="adj1" fmla="val 10986789"/>
-                <a:gd name="adj2" fmla="val 0"/>
-              </a:avLst>
-            </a:prstGeom>
-            <a:ln w="38100">
-              <a:headEnd type="none" w="med" len="med"/>
-              <a:tailEnd type="triangle" w="lg" len="lg"/>
-            </a:ln>
-          </p:spPr>
-          <p:style>
-            <a:lnRef idx="1">
-              <a:schemeClr val="dk1"/>
-            </a:lnRef>
-            <a:fillRef idx="0">
-              <a:schemeClr val="dk1"/>
-            </a:fillRef>
-            <a:effectRef idx="0">
-              <a:schemeClr val="dk1"/>
-            </a:effectRef>
-            <a:fontRef idx="minor">
-              <a:schemeClr val="tx1"/>
-            </a:fontRef>
-          </p:style>
-          <p:txBody>
-            <a:bodyPr rtlCol="0" anchor="ctr"/>
-            <a:lstStyle/>
-            <a:p>
-              <a:pPr algn="ctr"/>
-              <a:endParaRPr lang="es-MX"/>
-            </a:p>
-          </p:txBody>
-        </p:sp>
-        <p:sp>
-          <p:nvSpPr>
-            <p:cNvPr id="146" name="CuadroTexto 145">
-              <a:extLst>
-                <a:ext uri="{FF2B5EF4-FFF2-40B4-BE49-F238E27FC236}">
-                  <a16:creationId xmlns:a16="http://schemas.microsoft.com/office/drawing/2014/main" id="{59FDA6C7-D783-6858-8C02-736516821FCA}"/>
-                </a:ext>
-              </a:extLst>
-            </p:cNvPr>
-            <p:cNvSpPr txBox="1"/>
-            <p:nvPr/>
-          </p:nvSpPr>
-          <p:spPr>
-            <a:xfrm>
-              <a:off x="4520120" y="1082684"/>
-              <a:ext cx="2588517" cy="1200329"/>
-            </a:xfrm>
-            <a:prstGeom prst="rect">
-              <a:avLst/>
-            </a:prstGeom>
-            <a:noFill/>
-            <a:ln>
-              <a:noFill/>
-            </a:ln>
-          </p:spPr>
-          <p:style>
-            <a:lnRef idx="2">
-              <a:schemeClr val="dk1"/>
-            </a:lnRef>
-            <a:fillRef idx="1">
-              <a:schemeClr val="lt1"/>
-            </a:fillRef>
-            <a:effectRef idx="0">
-              <a:schemeClr val="dk1"/>
-            </a:effectRef>
-            <a:fontRef idx="minor">
-              <a:schemeClr val="dk1"/>
-            </a:fontRef>
-          </p:style>
-          <p:txBody>
-            <a:bodyPr wrap="square" rtlCol="0">
-              <a:spAutoFit/>
-            </a:bodyPr>
-            <a:lstStyle/>
-            <a:p>
-              <a:pPr algn="ctr"/>
-              <a:r>
-                <a:rPr lang="es-MX" sz="2400" dirty="0"/>
-                <a:t>Información de UAVs conectados a la red.</a:t>
-              </a:r>
-            </a:p>
-          </p:txBody>
-        </p:sp>
-        <p:sp>
-          <p:nvSpPr>
-            <p:cNvPr id="147" name="CuadroTexto 146">
-              <a:extLst>
-                <a:ext uri="{FF2B5EF4-FFF2-40B4-BE49-F238E27FC236}">
-                  <a16:creationId xmlns:a16="http://schemas.microsoft.com/office/drawing/2014/main" id="{AD62789E-BEDC-837B-E84F-96DAC1422935}"/>
-                </a:ext>
-              </a:extLst>
-            </p:cNvPr>
-            <p:cNvSpPr txBox="1"/>
-            <p:nvPr/>
-          </p:nvSpPr>
-          <p:spPr>
-            <a:xfrm>
-              <a:off x="4417195" y="3766823"/>
-              <a:ext cx="2794365" cy="1200329"/>
-            </a:xfrm>
-            <a:prstGeom prst="rect">
-              <a:avLst/>
-            </a:prstGeom>
-            <a:noFill/>
-            <a:ln>
-              <a:noFill/>
-            </a:ln>
-          </p:spPr>
-          <p:style>
-            <a:lnRef idx="2">
-              <a:schemeClr val="dk1"/>
-            </a:lnRef>
-            <a:fillRef idx="1">
-              <a:schemeClr val="lt1"/>
-            </a:fillRef>
-            <a:effectRef idx="0">
-              <a:schemeClr val="dk1"/>
-            </a:effectRef>
-            <a:fontRef idx="minor">
-              <a:schemeClr val="dk1"/>
-            </a:fontRef>
-          </p:style>
-          <p:txBody>
-            <a:bodyPr wrap="square" rtlCol="0">
-              <a:spAutoFit/>
-            </a:bodyPr>
-            <a:lstStyle/>
-            <a:p>
-              <a:pPr algn="ctr"/>
-              <a:r>
-                <a:rPr lang="es-MX" sz="2400" dirty="0"/>
-                <a:t>Posiciones actualizadas de UAVs.</a:t>
-              </a:r>
-            </a:p>
-          </p:txBody>
-        </p:sp>
-      </p:grpSp>
       <p:sp>
         <p:nvSpPr>
           <p:cNvPr id="148" name="CuadroTexto 147">
@@ -6221,7 +6159,7 @@
         </p:nvSpPr>
         <p:spPr>
           <a:xfrm>
-            <a:off x="17232023" y="14306777"/>
+            <a:off x="16763234" y="22961333"/>
             <a:ext cx="13258800" cy="769441"/>
           </a:xfrm>
           <a:prstGeom prst="rect">
@@ -6250,108 +6188,6 @@
             <a:r>
               <a:rPr lang="es-MX" sz="4400" dirty="0"/>
               <a:t> </a:t>
-            </a:r>
-          </a:p>
-        </p:txBody>
-      </p:sp>
-      <p:pic>
-        <p:nvPicPr>
-          <p:cNvPr id="33" name="Imagen 32">
-            <a:extLst>
-              <a:ext uri="{FF2B5EF4-FFF2-40B4-BE49-F238E27FC236}">
-                <a16:creationId xmlns:a16="http://schemas.microsoft.com/office/drawing/2014/main" id="{63931F15-10B2-EE71-C312-939047635FCE}"/>
-              </a:ext>
-            </a:extLst>
-          </p:cNvPr>
-          <p:cNvPicPr>
-            <a:picLocks noChangeAspect="1"/>
-          </p:cNvPicPr>
-          <p:nvPr/>
-        </p:nvPicPr>
-        <p:blipFill>
-          <a:blip r:embed="rId7"/>
-          <a:stretch>
-            <a:fillRect/>
-          </a:stretch>
-        </p:blipFill>
-        <p:spPr>
-          <a:xfrm>
-            <a:off x="18461423" y="22648096"/>
-            <a:ext cx="5400000" cy="4891479"/>
-          </a:xfrm>
-          <a:prstGeom prst="rect">
-            <a:avLst/>
-          </a:prstGeom>
-          <a:effectLst>
-            <a:softEdge rad="63500"/>
-          </a:effectLst>
-        </p:spPr>
-      </p:pic>
-      <p:pic>
-        <p:nvPicPr>
-          <p:cNvPr id="35" name="Imagen 34">
-            <a:extLst>
-              <a:ext uri="{FF2B5EF4-FFF2-40B4-BE49-F238E27FC236}">
-                <a16:creationId xmlns:a16="http://schemas.microsoft.com/office/drawing/2014/main" id="{58C00B5C-4521-0A47-6BF3-B46801607BD5}"/>
-              </a:ext>
-            </a:extLst>
-          </p:cNvPr>
-          <p:cNvPicPr>
-            <a:picLocks noChangeAspect="1"/>
-          </p:cNvPicPr>
-          <p:nvPr/>
-        </p:nvPicPr>
-        <p:blipFill>
-          <a:blip r:embed="rId8"/>
-          <a:stretch>
-            <a:fillRect/>
-          </a:stretch>
-        </p:blipFill>
-        <p:spPr>
-          <a:xfrm>
-            <a:off x="24423820" y="22648096"/>
-            <a:ext cx="5400000" cy="4891479"/>
-          </a:xfrm>
-          <a:prstGeom prst="rect">
-            <a:avLst/>
-          </a:prstGeom>
-          <a:effectLst>
-            <a:softEdge rad="63500"/>
-          </a:effectLst>
-        </p:spPr>
-      </p:pic>
-      <p:sp>
-        <p:nvSpPr>
-          <p:cNvPr id="36" name="CuadroTexto 35">
-            <a:extLst>
-              <a:ext uri="{FF2B5EF4-FFF2-40B4-BE49-F238E27FC236}">
-                <a16:creationId xmlns:a16="http://schemas.microsoft.com/office/drawing/2014/main" id="{BD7A5963-BAE4-12B4-1229-76FD8975E608}"/>
-              </a:ext>
-            </a:extLst>
-          </p:cNvPr>
-          <p:cNvSpPr txBox="1"/>
-          <p:nvPr/>
-        </p:nvSpPr>
-        <p:spPr>
-          <a:xfrm>
-            <a:off x="17207686" y="28093501"/>
-            <a:ext cx="10748367" cy="1815882"/>
-          </a:xfrm>
-          <a:prstGeom prst="rect">
-            <a:avLst/>
-          </a:prstGeom>
-          <a:noFill/>
-        </p:spPr>
-        <p:txBody>
-          <a:bodyPr wrap="square" rtlCol="0">
-            <a:spAutoFit/>
-          </a:bodyPr>
-          <a:lstStyle/>
-          <a:p>
-            <a:pPr algn="just"/>
-            <a:r>
-              <a:rPr lang="es-MX" sz="2800" dirty="0"/>
-              <a:t>Seguimiento de una trayectoria de referencia en formación Delta con 10 robots. La trayectoria es conocida por el robot líder y la información de su posición se disemina entre los 9 robots seguidores que calculan su movimiento para mantener la formación durante el recorrido.</a:t>
             </a:r>
           </a:p>
         </p:txBody>
@@ -6371,7 +6207,7 @@
           <p:nvPr/>
         </p:nvPicPr>
         <p:blipFill>
-          <a:blip r:embed="rId9">
+          <a:blip r:embed="rId7">
             <a:extLst>
               <a:ext uri="{28A0092B-C50C-407E-A947-70E740481C1C}">
                 <a14:useLocalDpi xmlns:a14="http://schemas.microsoft.com/office/drawing/2010/main" val="0"/>
@@ -6407,7 +6243,7 @@
           <p:nvPr/>
         </p:nvPicPr>
         <p:blipFill>
-          <a:blip r:embed="rId10">
+          <a:blip r:embed="rId8">
             <a:extLst>
               <a:ext uri="{28A0092B-C50C-407E-A947-70E740481C1C}">
                 <a14:useLocalDpi xmlns:a14="http://schemas.microsoft.com/office/drawing/2010/main" val="0"/>
@@ -6443,7 +6279,7 @@
           <p:nvPr/>
         </p:nvPicPr>
         <p:blipFill>
-          <a:blip r:embed="rId11">
+          <a:blip r:embed="rId9">
             <a:extLst>
               <a:ext uri="{28A0092B-C50C-407E-A947-70E740481C1C}">
                 <a14:useLocalDpi xmlns:a14="http://schemas.microsoft.com/office/drawing/2010/main" val="0"/>
@@ -6479,7 +6315,7 @@
           <p:nvPr/>
         </p:nvPicPr>
         <p:blipFill>
-          <a:blip r:embed="rId12">
+          <a:blip r:embed="rId10">
             <a:extLst>
               <a:ext uri="{28A0092B-C50C-407E-A947-70E740481C1C}">
                 <a14:useLocalDpi xmlns:a14="http://schemas.microsoft.com/office/drawing/2010/main" val="0"/>
@@ -6515,7 +6351,7 @@
           <p:nvPr/>
         </p:nvPicPr>
         <p:blipFill>
-          <a:blip r:embed="rId13"/>
+          <a:blip r:embed="rId11"/>
           <a:stretch>
             <a:fillRect/>
           </a:stretch>
@@ -6545,14 +6381,14 @@
           <p:nvPr/>
         </p:nvPicPr>
         <p:blipFill>
-          <a:blip r:embed="rId14"/>
+          <a:blip r:embed="rId12"/>
           <a:stretch>
             <a:fillRect/>
           </a:stretch>
         </p:blipFill>
         <p:spPr>
           <a:xfrm>
-            <a:off x="1520999" y="33440049"/>
+            <a:off x="1591337" y="33615894"/>
             <a:ext cx="10320027" cy="2211033"/>
           </a:xfrm>
           <a:prstGeom prst="rect">
@@ -6722,7 +6558,7 @@
           <p:nvPr/>
         </p:nvPicPr>
         <p:blipFill>
-          <a:blip r:embed="rId15">
+          <a:blip r:embed="rId13">
             <a:extLst>
               <a:ext uri="{28A0092B-C50C-407E-A947-70E740481C1C}">
                 <a14:useLocalDpi xmlns:a14="http://schemas.microsoft.com/office/drawing/2010/main" val="0"/>
@@ -6758,7 +6594,7 @@
           <p:nvPr/>
         </p:nvPicPr>
         <p:blipFill>
-          <a:blip r:embed="rId16">
+          <a:blip r:embed="rId14">
             <a:extLst>
               <a:ext uri="{28A0092B-C50C-407E-A947-70E740481C1C}">
                 <a14:useLocalDpi xmlns:a14="http://schemas.microsoft.com/office/drawing/2010/main" val="0"/>
@@ -6794,7 +6630,7 @@
           <p:nvPr/>
         </p:nvPicPr>
         <p:blipFill>
-          <a:blip r:embed="rId17">
+          <a:blip r:embed="rId15">
             <a:extLst>
               <a:ext uri="{28A0092B-C50C-407E-A947-70E740481C1C}">
                 <a14:useLocalDpi xmlns:a14="http://schemas.microsoft.com/office/drawing/2010/main" val="0"/>
@@ -6962,7 +6798,7 @@
           <p:nvPr/>
         </p:nvPicPr>
         <p:blipFill>
-          <a:blip r:embed="rId18"/>
+          <a:blip r:embed="rId16"/>
           <a:stretch>
             <a:fillRect/>
           </a:stretch>
@@ -8026,8 +7862,8 @@
         </p:nvSpPr>
         <p:spPr>
           <a:xfrm>
-            <a:off x="1822064" y="37931193"/>
-            <a:ext cx="8348044" cy="1039617"/>
+            <a:off x="1891151" y="38292199"/>
+            <a:ext cx="14028787" cy="1039617"/>
           </a:xfrm>
           <a:prstGeom prst="rect">
             <a:avLst/>
@@ -8130,9 +7966,26 @@
             </a:lvl9pPr>
           </a:lstStyle>
           <a:p>
+            <a:pPr algn="just"/>
             <a:r>
               <a:rPr lang="es-MX" sz="3200" dirty="0"/>
-              <a:t>Para corregir las mediciones se define un modelo de transformación afín expresado como</a:t>
+              <a:t>La nivelación con </a:t>
+            </a:r>
+            <a:r>
+              <a:rPr lang="es-MX" sz="3200" dirty="0" err="1"/>
+              <a:t>Rodrigues</a:t>
+            </a:r>
+            <a:r>
+              <a:rPr lang="es-MX" sz="3200" dirty="0"/>
+              <a:t> corrige la inclinación física con la que el sensor está montado respecto al mundo. Su objetivo es rotar las mediciones para que la gravedad apunte exactamente hacia el eje </a:t>
+            </a:r>
+            <a:r>
+              <a:rPr lang="es-MX" sz="3200" b="1" dirty="0"/>
+              <a:t>Z </a:t>
+            </a:r>
+            <a:r>
+              <a:rPr lang="es-MX" sz="3200" dirty="0"/>
+              <a:t>en reposo.</a:t>
             </a:r>
             <a:endParaRPr lang="en-US" sz="3200" dirty="0">
               <a:solidFill>
@@ -8142,6 +7995,581 @@
                 </a:schemeClr>
               </a:solidFill>
             </a:endParaRPr>
+          </a:p>
+        </p:txBody>
+      </p:sp>
+      <mc:AlternateContent xmlns:mc="http://schemas.openxmlformats.org/markup-compatibility/2006">
+        <mc:Choice xmlns:a14="http://schemas.microsoft.com/office/drawing/2010/main" Requires="a14">
+          <p:sp>
+            <p:nvSpPr>
+              <p:cNvPr id="18" name="CuadroTexto 17">
+                <a:extLst>
+                  <a:ext uri="{FF2B5EF4-FFF2-40B4-BE49-F238E27FC236}">
+                    <a16:creationId xmlns:a16="http://schemas.microsoft.com/office/drawing/2014/main" id="{481806CD-9859-AAD0-2FDB-015FC418A0BB}"/>
+                  </a:ext>
+                </a:extLst>
+              </p:cNvPr>
+              <p:cNvSpPr txBox="1"/>
+              <p:nvPr/>
+            </p:nvSpPr>
+            <p:spPr>
+              <a:xfrm>
+                <a:off x="1147689" y="39715063"/>
+                <a:ext cx="14295119" cy="1200329"/>
+              </a:xfrm>
+              <a:prstGeom prst="rect">
+                <a:avLst/>
+              </a:prstGeom>
+              <a:noFill/>
+            </p:spPr>
+            <p:txBody>
+              <a:bodyPr wrap="square" rtlCol="0">
+                <a:spAutoFit/>
+              </a:bodyPr>
+              <a:lstStyle/>
+              <a:p>
+                <a:pPr algn="just"/>
+                <a:endParaRPr lang="es-ES" sz="3600" dirty="0">
+                  <a:solidFill>
+                    <a:schemeClr val="accent1">
+                      <a:lumMod val="50000"/>
+                    </a:schemeClr>
+                  </a:solidFill>
+                </a:endParaRPr>
+              </a:p>
+              <a:p>
+                <a:pPr algn="just"/>
+                <a14:m>
+                  <m:oMathPara xmlns:m="http://schemas.openxmlformats.org/officeDocument/2006/math">
+                    <m:oMathParaPr>
+                      <m:jc m:val="centerGroup"/>
+                    </m:oMathParaPr>
+                    <m:oMath xmlns:m="http://schemas.openxmlformats.org/officeDocument/2006/math">
+                      <m:r>
+                        <a:rPr lang="es-MX" sz="3600" i="1">
+                          <a:solidFill>
+                            <a:schemeClr val="accent1">
+                              <a:lumMod val="50000"/>
+                            </a:schemeClr>
+                          </a:solidFill>
+                          <a:latin typeface="Cambria Math" panose="02040503050406030204" pitchFamily="18" charset="0"/>
+                          <a:ea typeface="Calibri" panose="020F0502020204030204" pitchFamily="34" charset="0"/>
+                          <a:cs typeface="Calibri" panose="020F0502020204030204" pitchFamily="34" charset="0"/>
+                        </a:rPr>
+                        <m:t>𝑅</m:t>
+                      </m:r>
+                      <m:r>
+                        <a:rPr lang="es-MX" sz="3600" i="1">
+                          <a:solidFill>
+                            <a:schemeClr val="accent1">
+                              <a:lumMod val="50000"/>
+                            </a:schemeClr>
+                          </a:solidFill>
+                          <a:latin typeface="Cambria Math" panose="02040503050406030204" pitchFamily="18" charset="0"/>
+                          <a:ea typeface="Calibri" panose="020F0502020204030204" pitchFamily="34" charset="0"/>
+                          <a:cs typeface="Calibri" panose="020F0502020204030204" pitchFamily="34" charset="0"/>
+                        </a:rPr>
+                        <m:t> = </m:t>
+                      </m:r>
+                      <m:r>
+                        <a:rPr lang="es-MX" sz="3600" i="1">
+                          <a:solidFill>
+                            <a:schemeClr val="accent1">
+                              <a:lumMod val="50000"/>
+                            </a:schemeClr>
+                          </a:solidFill>
+                          <a:latin typeface="Cambria Math" panose="02040503050406030204" pitchFamily="18" charset="0"/>
+                          <a:ea typeface="Calibri" panose="020F0502020204030204" pitchFamily="34" charset="0"/>
+                          <a:cs typeface="Calibri" panose="020F0502020204030204" pitchFamily="34" charset="0"/>
+                        </a:rPr>
+                        <m:t>𝐼</m:t>
+                      </m:r>
+                      <m:r>
+                        <a:rPr lang="es-MX" sz="3600" i="1">
+                          <a:solidFill>
+                            <a:schemeClr val="accent1">
+                              <a:lumMod val="50000"/>
+                            </a:schemeClr>
+                          </a:solidFill>
+                          <a:latin typeface="Cambria Math" panose="02040503050406030204" pitchFamily="18" charset="0"/>
+                          <a:ea typeface="Calibri" panose="020F0502020204030204" pitchFamily="34" charset="0"/>
+                          <a:cs typeface="Calibri" panose="020F0502020204030204" pitchFamily="34" charset="0"/>
+                        </a:rPr>
+                        <m:t> + </m:t>
+                      </m:r>
+                      <m:r>
+                        <a:rPr lang="es-MX" sz="3600" i="1">
+                          <a:solidFill>
+                            <a:schemeClr val="accent1">
+                              <a:lumMod val="50000"/>
+                            </a:schemeClr>
+                          </a:solidFill>
+                          <a:latin typeface="Cambria Math" panose="02040503050406030204" pitchFamily="18" charset="0"/>
+                          <a:ea typeface="Calibri" panose="020F0502020204030204" pitchFamily="34" charset="0"/>
+                          <a:cs typeface="Calibri" panose="020F0502020204030204" pitchFamily="34" charset="0"/>
+                        </a:rPr>
+                        <m:t>𝑠𝑖𝑛</m:t>
+                      </m:r>
+                      <m:r>
+                        <a:rPr lang="es-MX" sz="3600" i="1">
+                          <a:solidFill>
+                            <a:schemeClr val="accent1">
+                              <a:lumMod val="50000"/>
+                            </a:schemeClr>
+                          </a:solidFill>
+                          <a:latin typeface="Cambria Math" panose="02040503050406030204" pitchFamily="18" charset="0"/>
+                          <a:ea typeface="Calibri" panose="020F0502020204030204" pitchFamily="34" charset="0"/>
+                          <a:cs typeface="Calibri" panose="020F0502020204030204" pitchFamily="34" charset="0"/>
+                        </a:rPr>
+                        <m:t>(</m:t>
+                      </m:r>
+                      <m:r>
+                        <a:rPr lang="es-MX" sz="3600" i="1">
+                          <a:solidFill>
+                            <a:schemeClr val="accent1">
+                              <a:lumMod val="50000"/>
+                            </a:schemeClr>
+                          </a:solidFill>
+                          <a:latin typeface="Cambria Math" panose="02040503050406030204" pitchFamily="18" charset="0"/>
+                          <a:ea typeface="Calibri" panose="020F0502020204030204" pitchFamily="34" charset="0"/>
+                          <a:cs typeface="Calibri" panose="020F0502020204030204" pitchFamily="34" charset="0"/>
+                        </a:rPr>
+                        <m:t>𝜃</m:t>
+                      </m:r>
+                      <m:r>
+                        <a:rPr lang="es-MX" sz="3600" i="1">
+                          <a:solidFill>
+                            <a:schemeClr val="accent1">
+                              <a:lumMod val="50000"/>
+                            </a:schemeClr>
+                          </a:solidFill>
+                          <a:latin typeface="Cambria Math" panose="02040503050406030204" pitchFamily="18" charset="0"/>
+                          <a:ea typeface="Calibri" panose="020F0502020204030204" pitchFamily="34" charset="0"/>
+                          <a:cs typeface="Calibri" panose="020F0502020204030204" pitchFamily="34" charset="0"/>
+                        </a:rPr>
+                        <m:t>) </m:t>
+                      </m:r>
+                      <m:r>
+                        <a:rPr lang="es-MX" sz="3600" i="1">
+                          <a:solidFill>
+                            <a:schemeClr val="accent1">
+                              <a:lumMod val="50000"/>
+                            </a:schemeClr>
+                          </a:solidFill>
+                          <a:latin typeface="Cambria Math" panose="02040503050406030204" pitchFamily="18" charset="0"/>
+                          <a:ea typeface="Calibri" panose="020F0502020204030204" pitchFamily="34" charset="0"/>
+                          <a:cs typeface="Calibri" panose="020F0502020204030204" pitchFamily="34" charset="0"/>
+                        </a:rPr>
+                        <m:t>𝐾</m:t>
+                      </m:r>
+                      <m:r>
+                        <a:rPr lang="es-MX" sz="3600" i="1">
+                          <a:solidFill>
+                            <a:schemeClr val="accent1">
+                              <a:lumMod val="50000"/>
+                            </a:schemeClr>
+                          </a:solidFill>
+                          <a:latin typeface="Cambria Math" panose="02040503050406030204" pitchFamily="18" charset="0"/>
+                          <a:ea typeface="Calibri" panose="020F0502020204030204" pitchFamily="34" charset="0"/>
+                          <a:cs typeface="Calibri" panose="020F0502020204030204" pitchFamily="34" charset="0"/>
+                        </a:rPr>
+                        <m:t> + (1 − </m:t>
+                      </m:r>
+                      <m:r>
+                        <a:rPr lang="es-MX" sz="3600" i="1">
+                          <a:solidFill>
+                            <a:schemeClr val="accent1">
+                              <a:lumMod val="50000"/>
+                            </a:schemeClr>
+                          </a:solidFill>
+                          <a:latin typeface="Cambria Math" panose="02040503050406030204" pitchFamily="18" charset="0"/>
+                          <a:ea typeface="Calibri" panose="020F0502020204030204" pitchFamily="34" charset="0"/>
+                          <a:cs typeface="Calibri" panose="020F0502020204030204" pitchFamily="34" charset="0"/>
+                        </a:rPr>
+                        <m:t>𝑐𝑜𝑠</m:t>
+                      </m:r>
+                      <m:r>
+                        <a:rPr lang="es-MX" sz="3600" i="1">
+                          <a:solidFill>
+                            <a:schemeClr val="accent1">
+                              <a:lumMod val="50000"/>
+                            </a:schemeClr>
+                          </a:solidFill>
+                          <a:latin typeface="Cambria Math" panose="02040503050406030204" pitchFamily="18" charset="0"/>
+                          <a:ea typeface="Calibri" panose="020F0502020204030204" pitchFamily="34" charset="0"/>
+                          <a:cs typeface="Calibri" panose="020F0502020204030204" pitchFamily="34" charset="0"/>
+                        </a:rPr>
+                        <m:t>(</m:t>
+                      </m:r>
+                      <m:r>
+                        <a:rPr lang="es-MX" sz="3600" i="1">
+                          <a:solidFill>
+                            <a:schemeClr val="accent1">
+                              <a:lumMod val="50000"/>
+                            </a:schemeClr>
+                          </a:solidFill>
+                          <a:latin typeface="Cambria Math" panose="02040503050406030204" pitchFamily="18" charset="0"/>
+                          <a:ea typeface="Calibri" panose="020F0502020204030204" pitchFamily="34" charset="0"/>
+                          <a:cs typeface="Calibri" panose="020F0502020204030204" pitchFamily="34" charset="0"/>
+                        </a:rPr>
+                        <m:t>𝜃</m:t>
+                      </m:r>
+                      <m:r>
+                        <a:rPr lang="es-MX" sz="3600" i="1">
+                          <a:solidFill>
+                            <a:schemeClr val="accent1">
+                              <a:lumMod val="50000"/>
+                            </a:schemeClr>
+                          </a:solidFill>
+                          <a:latin typeface="Cambria Math" panose="02040503050406030204" pitchFamily="18" charset="0"/>
+                          <a:ea typeface="Calibri" panose="020F0502020204030204" pitchFamily="34" charset="0"/>
+                          <a:cs typeface="Calibri" panose="020F0502020204030204" pitchFamily="34" charset="0"/>
+                        </a:rPr>
+                        <m:t>)) </m:t>
+                      </m:r>
+                      <m:sSup>
+                        <m:sSupPr>
+                          <m:ctrlPr>
+                            <a:rPr lang="es-MX" sz="3600" i="1">
+                              <a:solidFill>
+                                <a:schemeClr val="accent1">
+                                  <a:lumMod val="50000"/>
+                                </a:schemeClr>
+                              </a:solidFill>
+                              <a:latin typeface="Cambria Math" panose="02040503050406030204" pitchFamily="18" charset="0"/>
+                            </a:rPr>
+                          </m:ctrlPr>
+                        </m:sSupPr>
+                        <m:e>
+                          <m:r>
+                            <a:rPr lang="es-MX" sz="3600" i="1">
+                              <a:solidFill>
+                                <a:schemeClr val="accent1">
+                                  <a:lumMod val="50000"/>
+                                </a:schemeClr>
+                              </a:solidFill>
+                              <a:latin typeface="Cambria Math" panose="02040503050406030204" pitchFamily="18" charset="0"/>
+                              <a:ea typeface="Calibri" panose="020F0502020204030204" pitchFamily="34" charset="0"/>
+                              <a:cs typeface="Calibri" panose="020F0502020204030204" pitchFamily="34" charset="0"/>
+                            </a:rPr>
+                            <m:t>𝐾</m:t>
+                          </m:r>
+                        </m:e>
+                        <m:sup>
+                          <m:r>
+                            <a:rPr lang="es-MX" sz="3600" i="1">
+                              <a:solidFill>
+                                <a:schemeClr val="accent1">
+                                  <a:lumMod val="50000"/>
+                                </a:schemeClr>
+                              </a:solidFill>
+                              <a:latin typeface="Cambria Math" panose="02040503050406030204" pitchFamily="18" charset="0"/>
+                              <a:ea typeface="Calibri" panose="020F0502020204030204" pitchFamily="34" charset="0"/>
+                              <a:cs typeface="Calibri" panose="020F0502020204030204" pitchFamily="34" charset="0"/>
+                            </a:rPr>
+                            <m:t>2</m:t>
+                          </m:r>
+                        </m:sup>
+                      </m:sSup>
+                    </m:oMath>
+                  </m:oMathPara>
+                </a14:m>
+                <a:endParaRPr lang="es-MX" sz="3600" dirty="0">
+                  <a:solidFill>
+                    <a:schemeClr val="accent1">
+                      <a:lumMod val="50000"/>
+                    </a:schemeClr>
+                  </a:solidFill>
+                </a:endParaRPr>
+              </a:p>
+            </p:txBody>
+          </p:sp>
+        </mc:Choice>
+        <mc:Fallback>
+          <p:sp>
+            <p:nvSpPr>
+              <p:cNvPr id="18" name="CuadroTexto 17">
+                <a:extLst>
+                  <a:ext uri="{FF2B5EF4-FFF2-40B4-BE49-F238E27FC236}">
+                    <a16:creationId xmlns:a16="http://schemas.microsoft.com/office/drawing/2014/main" id="{481806CD-9859-AAD0-2FDB-015FC418A0BB}"/>
+                  </a:ext>
+                </a:extLst>
+              </p:cNvPr>
+              <p:cNvSpPr txBox="1">
+                <a:spLocks noRot="1" noChangeAspect="1" noMove="1" noResize="1" noEditPoints="1" noAdjustHandles="1" noChangeArrowheads="1" noChangeShapeType="1" noTextEdit="1"/>
+              </p:cNvSpPr>
+              <p:nvPr/>
+            </p:nvSpPr>
+            <p:spPr>
+              <a:xfrm>
+                <a:off x="1147689" y="39715063"/>
+                <a:ext cx="14295119" cy="1200329"/>
+              </a:xfrm>
+              <a:prstGeom prst="rect">
+                <a:avLst/>
+              </a:prstGeom>
+              <a:blipFill>
+                <a:blip r:embed="rId17"/>
+                <a:stretch>
+                  <a:fillRect/>
+                </a:stretch>
+              </a:blipFill>
+            </p:spPr>
+            <p:txBody>
+              <a:bodyPr/>
+              <a:lstStyle/>
+              <a:p>
+                <a:r>
+                  <a:rPr lang="es-MX">
+                    <a:noFill/>
+                  </a:rPr>
+                  <a:t> </a:t>
+                </a:r>
+              </a:p>
+            </p:txBody>
+          </p:sp>
+        </mc:Fallback>
+      </mc:AlternateContent>
+      <p:sp>
+        <p:nvSpPr>
+          <p:cNvPr id="40" name="CuadroTexto 39">
+            <a:extLst>
+              <a:ext uri="{FF2B5EF4-FFF2-40B4-BE49-F238E27FC236}">
+                <a16:creationId xmlns:a16="http://schemas.microsoft.com/office/drawing/2014/main" id="{7870BD3C-59B9-385F-AEA0-B8C3BF78B800}"/>
+              </a:ext>
+            </a:extLst>
+          </p:cNvPr>
+          <p:cNvSpPr txBox="1"/>
+          <p:nvPr/>
+        </p:nvSpPr>
+        <p:spPr>
+          <a:xfrm>
+            <a:off x="16859696" y="14709911"/>
+            <a:ext cx="13258800" cy="769441"/>
+          </a:xfrm>
+          <a:prstGeom prst="rect">
+            <a:avLst/>
+          </a:prstGeom>
+          <a:noFill/>
+        </p:spPr>
+        <p:txBody>
+          <a:bodyPr wrap="square" rtlCol="0">
+            <a:spAutoFit/>
+          </a:bodyPr>
+          <a:lstStyle/>
+          <a:p>
+            <a:pPr marL="571500" indent="-571500">
+              <a:buFont typeface="Arial" panose="020B0604020202020204" pitchFamily="34" charset="0"/>
+              <a:buChar char="•"/>
+            </a:pPr>
+            <a:r>
+              <a:rPr lang="es-MX" sz="4400" dirty="0"/>
+              <a:t>Datos crudos en comparación de calibración aplicada</a:t>
+            </a:r>
+          </a:p>
+        </p:txBody>
+      </p:sp>
+      <p:pic>
+        <p:nvPicPr>
+          <p:cNvPr id="45" name="Imagen 44">
+            <a:extLst>
+              <a:ext uri="{FF2B5EF4-FFF2-40B4-BE49-F238E27FC236}">
+                <a16:creationId xmlns:a16="http://schemas.microsoft.com/office/drawing/2014/main" id="{7AF25FFD-0C3F-55E0-AC2C-06728FDE348D}"/>
+              </a:ext>
+            </a:extLst>
+          </p:cNvPr>
+          <p:cNvPicPr>
+            <a:picLocks noChangeAspect="1"/>
+          </p:cNvPicPr>
+          <p:nvPr/>
+        </p:nvPicPr>
+        <p:blipFill>
+          <a:blip r:embed="rId18"/>
+          <a:stretch>
+            <a:fillRect/>
+          </a:stretch>
+        </p:blipFill>
+        <p:spPr>
+          <a:xfrm>
+            <a:off x="17068800" y="15856519"/>
+            <a:ext cx="13657861" cy="6699267"/>
+          </a:xfrm>
+          <a:prstGeom prst="rect">
+            <a:avLst/>
+          </a:prstGeom>
+        </p:spPr>
+      </p:pic>
+      <p:sp>
+        <p:nvSpPr>
+          <p:cNvPr id="52" name="CuadroTexto 51">
+            <a:extLst>
+              <a:ext uri="{FF2B5EF4-FFF2-40B4-BE49-F238E27FC236}">
+                <a16:creationId xmlns:a16="http://schemas.microsoft.com/office/drawing/2014/main" id="{77E1988D-6195-C40E-A2B1-025995ED2FA4}"/>
+              </a:ext>
+            </a:extLst>
+          </p:cNvPr>
+          <p:cNvSpPr txBox="1"/>
+          <p:nvPr/>
+        </p:nvSpPr>
+        <p:spPr>
+          <a:xfrm>
+            <a:off x="18018450" y="23754326"/>
+            <a:ext cx="10748367" cy="523220"/>
+          </a:xfrm>
+          <a:prstGeom prst="rect">
+            <a:avLst/>
+          </a:prstGeom>
+          <a:noFill/>
+        </p:spPr>
+        <p:txBody>
+          <a:bodyPr wrap="square" rtlCol="0">
+            <a:spAutoFit/>
+          </a:bodyPr>
+          <a:lstStyle/>
+          <a:p>
+            <a:pPr algn="ctr"/>
+            <a:r>
+              <a:rPr lang="es-MX" sz="2800" dirty="0"/>
+              <a:t>Comparación 3D: Antes vs. Después de </a:t>
+            </a:r>
+            <a:r>
+              <a:rPr lang="es-MX" sz="2800" dirty="0" err="1"/>
+              <a:t>Rodrigues</a:t>
+            </a:r>
+            <a:endParaRPr lang="es-MX" sz="2800" dirty="0"/>
+          </a:p>
+        </p:txBody>
+      </p:sp>
+      <p:pic>
+        <p:nvPicPr>
+          <p:cNvPr id="56" name="Imagen 55">
+            <a:extLst>
+              <a:ext uri="{FF2B5EF4-FFF2-40B4-BE49-F238E27FC236}">
+                <a16:creationId xmlns:a16="http://schemas.microsoft.com/office/drawing/2014/main" id="{34B60496-A4BE-B88F-6FD8-AC96C3A24BA8}"/>
+              </a:ext>
+            </a:extLst>
+          </p:cNvPr>
+          <p:cNvPicPr>
+            <a:picLocks noChangeAspect="1"/>
+          </p:cNvPicPr>
+          <p:nvPr/>
+        </p:nvPicPr>
+        <p:blipFill>
+          <a:blip r:embed="rId19"/>
+          <a:stretch>
+            <a:fillRect/>
+          </a:stretch>
+        </p:blipFill>
+        <p:spPr>
+          <a:xfrm>
+            <a:off x="22185063" y="24422220"/>
+            <a:ext cx="4641661" cy="2320830"/>
+          </a:xfrm>
+          <a:prstGeom prst="rect">
+            <a:avLst/>
+          </a:prstGeom>
+        </p:spPr>
+      </p:pic>
+      <p:pic>
+        <p:nvPicPr>
+          <p:cNvPr id="60" name="Imagen 59">
+            <a:extLst>
+              <a:ext uri="{FF2B5EF4-FFF2-40B4-BE49-F238E27FC236}">
+                <a16:creationId xmlns:a16="http://schemas.microsoft.com/office/drawing/2014/main" id="{29ABF981-588D-A06C-20D9-BCA6BAC18CB5}"/>
+              </a:ext>
+            </a:extLst>
+          </p:cNvPr>
+          <p:cNvPicPr>
+            <a:picLocks noChangeAspect="1"/>
+          </p:cNvPicPr>
+          <p:nvPr/>
+        </p:nvPicPr>
+        <p:blipFill>
+          <a:blip r:embed="rId20"/>
+          <a:stretch>
+            <a:fillRect/>
+          </a:stretch>
+        </p:blipFill>
+        <p:spPr>
+          <a:xfrm>
+            <a:off x="17172218" y="24401462"/>
+            <a:ext cx="4733880" cy="2341588"/>
+          </a:xfrm>
+          <a:prstGeom prst="rect">
+            <a:avLst/>
+          </a:prstGeom>
+        </p:spPr>
+      </p:pic>
+      <p:pic>
+        <p:nvPicPr>
+          <p:cNvPr id="63" name="Imagen 62">
+            <a:extLst>
+              <a:ext uri="{FF2B5EF4-FFF2-40B4-BE49-F238E27FC236}">
+                <a16:creationId xmlns:a16="http://schemas.microsoft.com/office/drawing/2014/main" id="{DCE8314D-707E-540B-8E9D-33F632FE4B26}"/>
+              </a:ext>
+            </a:extLst>
+          </p:cNvPr>
+          <p:cNvPicPr>
+            <a:picLocks noChangeAspect="1"/>
+          </p:cNvPicPr>
+          <p:nvPr/>
+        </p:nvPicPr>
+        <p:blipFill>
+          <a:blip r:embed="rId21"/>
+          <a:stretch>
+            <a:fillRect/>
+          </a:stretch>
+        </p:blipFill>
+        <p:spPr>
+          <a:xfrm>
+            <a:off x="27064299" y="23891824"/>
+            <a:ext cx="3690021" cy="3756176"/>
+          </a:xfrm>
+          <a:prstGeom prst="rect">
+            <a:avLst/>
+          </a:prstGeom>
+        </p:spPr>
+      </p:pic>
+      <p:sp>
+        <p:nvSpPr>
+          <p:cNvPr id="129" name="CuadroTexto 128">
+            <a:extLst>
+              <a:ext uri="{FF2B5EF4-FFF2-40B4-BE49-F238E27FC236}">
+                <a16:creationId xmlns:a16="http://schemas.microsoft.com/office/drawing/2014/main" id="{7B2DEEB4-9015-2A37-0ED5-63CB18B2C422}"/>
+              </a:ext>
+            </a:extLst>
+          </p:cNvPr>
+          <p:cNvSpPr txBox="1"/>
+          <p:nvPr/>
+        </p:nvSpPr>
+        <p:spPr>
+          <a:xfrm>
+            <a:off x="17167191" y="29414448"/>
+            <a:ext cx="9897108" cy="523220"/>
+          </a:xfrm>
+          <a:prstGeom prst="rect">
+            <a:avLst/>
+          </a:prstGeom>
+          <a:noFill/>
+        </p:spPr>
+        <p:txBody>
+          <a:bodyPr wrap="square" rtlCol="0">
+            <a:spAutoFit/>
+          </a:bodyPr>
+          <a:lstStyle/>
+          <a:p>
+            <a:pPr algn="just"/>
+            <a:r>
+              <a:rPr lang="es-MX" sz="2800" b="1" i="1" dirty="0"/>
+              <a:t>Navegación en la interfaz por medio del QR     </a:t>
+            </a:r>
+            <a:r>
+              <a:rPr lang="es-MX" sz="2800" b="1" i="1" dirty="0">
+                <a:sym typeface="Wingdings" panose="05000000000000000000" pitchFamily="2" charset="2"/>
+              </a:rPr>
+              <a:t></a:t>
+            </a:r>
+            <a:endParaRPr lang="es-MX" sz="2800" b="1" i="1" dirty="0"/>
           </a:p>
         </p:txBody>
       </p:sp>
